--- a/docs/trials/2026-10-14-ppt-workflow/deck.pptx
+++ b/docs/trials/2026-10-14-ppt-workflow/deck.pptx
@@ -3544,8 +3544,8 @@
         </p:nvSpPr>
         <p:spPr>
           <a:xfrm>
-            <a:off x="512064" y="1188720"/>
-            <a:ext cx="5486400" cy="1127760"/>
+            <a:off x="512064" y="1874520"/>
+            <a:ext cx="5486400" cy="1310640"/>
           </a:xfrm>
           <a:prstGeom prst="rect">
             <a:avLst/>
@@ -3574,8 +3574,8 @@
         </p:nvSpPr>
         <p:spPr>
           <a:xfrm>
-            <a:off x="740664" y="1188720"/>
-            <a:ext cx="2286000" cy="1127760"/>
+            <a:off x="786384" y="1874520"/>
+            <a:ext cx="2651760" cy="1310640"/>
           </a:xfrm>
           <a:prstGeom prst="rect">
             <a:avLst/>
@@ -3589,7 +3589,7 @@
           <a:lstStyle/>
           <a:p>
             <a:r>
-              <a:rPr sz="6000" b="1">
+              <a:rPr sz="7200" b="1">
                 <a:solidFill>
                   <a:srgbClr val="1A1A1A"/>
                 </a:solidFill>
@@ -3619,8 +3619,8 @@
         </p:nvSpPr>
         <p:spPr>
           <a:xfrm>
-            <a:off x="3118104" y="1188720"/>
-            <a:ext cx="2697480" cy="1127760"/>
+            <a:off x="3529584" y="1874520"/>
+            <a:ext cx="2286000" cy="1310640"/>
           </a:xfrm>
           <a:prstGeom prst="rect">
             <a:avLst/>
@@ -3634,7 +3634,7 @@
           <a:lstStyle/>
           <a:p>
             <a:r>
-              <a:rPr sz="1600" b="1">
+              <a:rPr sz="2000" b="1">
                 <a:solidFill>
                   <a:srgbClr val="1A1A1A"/>
                 </a:solidFill>
@@ -3651,9 +3651,9 @@
               </a:spcBef>
             </a:pPr>
             <a:r>
-              <a:rPr sz="1400" b="0">
-                <a:solidFill>
-                  <a:srgbClr val="6B6B6B"/>
+              <a:rPr sz="1600" b="0">
+                <a:solidFill>
+                  <a:srgbClr val="333333"/>
                 </a:solidFill>
                 <a:latin typeface="Arial"/>
                 <a:ea typeface="PingFang SC"/>
@@ -3671,8 +3671,8 @@
         </p:nvSpPr>
         <p:spPr>
           <a:xfrm>
-            <a:off x="512064" y="2590800"/>
-            <a:ext cx="5486400" cy="1127760"/>
+            <a:off x="512064" y="3459480"/>
+            <a:ext cx="5486400" cy="1310640"/>
           </a:xfrm>
           <a:prstGeom prst="rect">
             <a:avLst/>
@@ -3701,8 +3701,8 @@
         </p:nvSpPr>
         <p:spPr>
           <a:xfrm>
-            <a:off x="512064" y="2590800"/>
-            <a:ext cx="54864" cy="1127760"/>
+            <a:off x="512064" y="3459480"/>
+            <a:ext cx="54864" cy="1310640"/>
           </a:xfrm>
           <a:prstGeom prst="rect">
             <a:avLst/>
@@ -3731,8 +3731,8 @@
         </p:nvSpPr>
         <p:spPr>
           <a:xfrm>
-            <a:off x="740664" y="2590800"/>
-            <a:ext cx="2286000" cy="1127760"/>
+            <a:off x="786384" y="3459480"/>
+            <a:ext cx="2651760" cy="1310640"/>
           </a:xfrm>
           <a:prstGeom prst="rect">
             <a:avLst/>
@@ -3746,7 +3746,7 @@
           <a:lstStyle/>
           <a:p>
             <a:r>
-              <a:rPr sz="6000" b="1">
+              <a:rPr sz="7200" b="1">
                 <a:solidFill>
                   <a:srgbClr val="DB011C"/>
                 </a:solidFill>
@@ -3776,8 +3776,8 @@
         </p:nvSpPr>
         <p:spPr>
           <a:xfrm>
-            <a:off x="3118104" y="2590800"/>
-            <a:ext cx="2697480" cy="1127760"/>
+            <a:off x="3529584" y="3459480"/>
+            <a:ext cx="2286000" cy="1310640"/>
           </a:xfrm>
           <a:prstGeom prst="rect">
             <a:avLst/>
@@ -3791,7 +3791,7 @@
           <a:lstStyle/>
           <a:p>
             <a:r>
-              <a:rPr sz="1600" b="1">
+              <a:rPr sz="2000" b="1">
                 <a:solidFill>
                   <a:srgbClr val="1A1A1A"/>
                 </a:solidFill>
@@ -3808,9 +3808,9 @@
               </a:spcBef>
             </a:pPr>
             <a:r>
-              <a:rPr sz="1400" b="0">
-                <a:solidFill>
-                  <a:srgbClr val="6B6B6B"/>
+              <a:rPr sz="1600" b="0">
+                <a:solidFill>
+                  <a:srgbClr val="333333"/>
                 </a:solidFill>
                 <a:latin typeface="Arial"/>
                 <a:ea typeface="PingFang SC"/>
@@ -3828,8 +3828,8 @@
         </p:nvSpPr>
         <p:spPr>
           <a:xfrm>
-            <a:off x="512064" y="3992880"/>
-            <a:ext cx="5486400" cy="1127760"/>
+            <a:off x="512064" y="5044440"/>
+            <a:ext cx="5486400" cy="1310640"/>
           </a:xfrm>
           <a:prstGeom prst="rect">
             <a:avLst/>
@@ -3858,8 +3858,8 @@
         </p:nvSpPr>
         <p:spPr>
           <a:xfrm>
-            <a:off x="740664" y="3992880"/>
-            <a:ext cx="2286000" cy="1127760"/>
+            <a:off x="786384" y="5044440"/>
+            <a:ext cx="2651760" cy="1310640"/>
           </a:xfrm>
           <a:prstGeom prst="rect">
             <a:avLst/>
@@ -3873,7 +3873,7 @@
           <a:lstStyle/>
           <a:p>
             <a:r>
-              <a:rPr sz="6000" b="1">
+              <a:rPr sz="7200" b="1">
                 <a:solidFill>
                   <a:srgbClr val="1A1A1A"/>
                 </a:solidFill>
@@ -3903,8 +3903,8 @@
         </p:nvSpPr>
         <p:spPr>
           <a:xfrm>
-            <a:off x="3118104" y="3992880"/>
-            <a:ext cx="2697480" cy="1127760"/>
+            <a:off x="3529584" y="5044440"/>
+            <a:ext cx="2286000" cy="1310640"/>
           </a:xfrm>
           <a:prstGeom prst="rect">
             <a:avLst/>
@@ -3918,7 +3918,7 @@
           <a:lstStyle/>
           <a:p>
             <a:r>
-              <a:rPr sz="1600" b="1">
+              <a:rPr sz="2000" b="1">
                 <a:solidFill>
                   <a:srgbClr val="1A1A1A"/>
                 </a:solidFill>
@@ -3935,9 +3935,9 @@
               </a:spcBef>
             </a:pPr>
             <a:r>
-              <a:rPr sz="1400" b="0">
-                <a:solidFill>
-                  <a:srgbClr val="6B6B6B"/>
+              <a:rPr sz="1600" b="0">
+                <a:solidFill>
+                  <a:srgbClr val="333333"/>
                 </a:solidFill>
                 <a:latin typeface="Arial"/>
                 <a:ea typeface="PingFang SC"/>
@@ -3955,7 +3955,7 @@
         </p:nvSpPr>
         <p:spPr>
           <a:xfrm>
-            <a:off x="6455664" y="1188720"/>
+            <a:off x="6455664" y="1874520"/>
             <a:ext cx="5221224" cy="320040"/>
           </a:xfrm>
           <a:prstGeom prst="rect">
@@ -3970,7 +3970,7 @@
           <a:lstStyle/>
           <a:p>
             <a:r>
-              <a:rPr sz="1800" b="1">
+              <a:rPr sz="2000" b="1">
                 <a:solidFill>
                   <a:srgbClr val="1A1A1A"/>
                 </a:solidFill>
@@ -3990,7 +3990,7 @@
         </p:nvSpPr>
         <p:spPr>
           <a:xfrm>
-            <a:off x="6455664" y="1645920"/>
+            <a:off x="6455664" y="2331720"/>
             <a:ext cx="5221224" cy="12700"/>
           </a:xfrm>
           <a:prstGeom prst="rect">
@@ -4020,8 +4020,8 @@
         </p:nvSpPr>
         <p:spPr>
           <a:xfrm>
-            <a:off x="6455664" y="1828800"/>
-            <a:ext cx="5221224" cy="2834640"/>
+            <a:off x="6455664" y="2514600"/>
+            <a:ext cx="5221224" cy="3383280"/>
           </a:xfrm>
           <a:prstGeom prst="rect">
             <a:avLst/>
@@ -4034,7 +4034,7 @@
           </a:bodyPr>
           <a:lstStyle/>
           <a:p>
-            <a:pPr marL="284480" indent="-284480">
+            <a:pPr marL="320040" indent="-320040">
               <a:lnSpc>
                 <a:spcPct val="115000"/>
               </a:lnSpc>
@@ -4045,7 +4045,7 @@
               <a:buAutoNum type="arabicPlain"/>
             </a:pPr>
             <a:r>
-              <a:rPr sz="1600" b="0">
+              <a:rPr sz="1800" b="0">
                 <a:solidFill>
                   <a:srgbClr val="1A1A1A"/>
                 </a:solidFill>
@@ -4056,12 +4056,12 @@
             </a:r>
           </a:p>
           <a:p>
-            <a:pPr marL="284480" indent="-284480">
+            <a:pPr marL="320040" indent="-320040">
               <a:lnSpc>
                 <a:spcPct val="115000"/>
               </a:lnSpc>
               <a:spcBef>
-                <a:spcPts val="1400"/>
+                <a:spcPts val="1600"/>
               </a:spcBef>
               <a:buClr>
                 <a:srgbClr val="6B6B6B"/>
@@ -4070,7 +4070,7 @@
               <a:buAutoNum type="arabicPlain"/>
             </a:pPr>
             <a:r>
-              <a:rPr sz="1600" b="0">
+              <a:rPr sz="1800" b="0">
                 <a:solidFill>
                   <a:srgbClr val="1A1A1A"/>
                 </a:solidFill>
@@ -4081,12 +4081,12 @@
             </a:r>
           </a:p>
           <a:p>
-            <a:pPr marL="284480" indent="-284480">
+            <a:pPr marL="320040" indent="-320040">
               <a:lnSpc>
                 <a:spcPct val="115000"/>
               </a:lnSpc>
               <a:spcBef>
-                <a:spcPts val="1400"/>
+                <a:spcPts val="1600"/>
               </a:spcBef>
               <a:buClr>
                 <a:srgbClr val="6B6B6B"/>
@@ -4095,7 +4095,7 @@
               <a:buAutoNum type="arabicPlain"/>
             </a:pPr>
             <a:r>
-              <a:rPr sz="1600" b="0">
+              <a:rPr sz="1800" b="0">
                 <a:solidFill>
                   <a:srgbClr val="1A1A1A"/>
                 </a:solidFill>
@@ -4115,7 +4115,7 @@
         </p:nvSpPr>
         <p:spPr>
           <a:xfrm>
-            <a:off x="6455664" y="4663440"/>
+            <a:off x="6455664" y="5897880"/>
             <a:ext cx="5221224" cy="457200"/>
           </a:xfrm>
           <a:prstGeom prst="rect">
@@ -4144,16 +4144,14 @@
       </p:sp>
       <p:sp>
         <p:nvSpPr>
-          <p:cNvPr id="18" name="Caption Bar"/>
-          <p:cNvSpPr txBox="1">
-            <a:spLocks noChangeArrowheads="1"/>
-          </p:cNvSpPr>
-          <p:nvPr/>
-        </p:nvSpPr>
-        <p:spPr bwMode="auto">
-          <a:xfrm>
-            <a:off x="155575" y="5379048"/>
-            <a:ext cx="11874874" cy="1097952"/>
+          <p:cNvPr id="18" name="Lead Accent"/>
+          <p:cNvSpPr/>
+          <p:nvPr/>
+        </p:nvSpPr>
+        <p:spPr>
+          <a:xfrm>
+            <a:off x="512064" y="1243584"/>
+            <a:ext cx="73152" cy="402336"/>
           </a:xfrm>
           <a:prstGeom prst="rect">
             <a:avLst/>
@@ -4161,45 +4159,49 @@
           <a:solidFill>
             <a:srgbClr val="DB011C"/>
           </a:solidFill>
-          <a:ln w="9525" cap="flat" cmpd="sng" algn="ctr">
-            <a:solidFill>
-              <a:schemeClr val="tx1"/>
-            </a:solidFill>
-            <a:prstDash val="solid"/>
-            <a:round/>
-            <a:headEnd type="none" w="med" len="med"/>
-            <a:tailEnd type="none" w="med" len="med"/>
+          <a:ln>
+            <a:noFill/>
           </a:ln>
           <a:effectLst/>
         </p:spPr>
         <p:txBody>
-          <a:bodyPr vert="horz" wrap="square" lIns="91440" tIns="45720" rIns="91440" bIns="45720" numCol="1" rtlCol="0" anchor="ctr" anchorCtr="0" compatLnSpc="1">
-            <a:prstTxWarp prst="textNoShape">
-              <a:avLst/>
-            </a:prstTxWarp>
+          <a:bodyPr rtlCol="0" anchor="ctr"/>
+          <a:lstStyle/>
+          <a:p>
+            <a:pPr algn="ctr"/>
+          </a:p>
+        </p:txBody>
+      </p:sp>
+      <p:sp>
+        <p:nvSpPr>
+          <p:cNvPr id="19" name="Lead"/>
+          <p:cNvSpPr txBox="1"/>
+          <p:nvPr/>
+        </p:nvSpPr>
+        <p:spPr>
+          <a:xfrm>
+            <a:off x="731520" y="1188720"/>
+            <a:ext cx="10936224" cy="512064"/>
+          </a:xfrm>
+          <a:prstGeom prst="rect">
+            <a:avLst/>
+          </a:prstGeom>
+          <a:noFill/>
+        </p:spPr>
+        <p:txBody>
+          <a:bodyPr wrap="square" lIns="0" rIns="0" tIns="0" bIns="0" anchor="ctr">
+            <a:spAutoFit/>
           </a:bodyPr>
-          <a:lstStyle>
-            <a:defPPr>
-              <a:defRPr lang="en-US"/>
-            </a:defPPr>
-            <a:lvl1pPr marL="342900" indent="-342900" eaLnBrk="0" hangingPunct="0">
-              <a:lnSpc>
-                <a:spcPct val="150000"/>
-              </a:lnSpc>
-              <a:buFont typeface="Wingdings" panose="05000000000000000000" pitchFamily="2" charset="2"/>
-              <a:buChar char="v"/>
-              <a:defRPr sz="1400" b="0">
-                <a:solidFill>
-                  <a:schemeClr val="bg1"/>
-                </a:solidFill>
-                <a:ea typeface="微软雅黑" panose="020B0503020204020204" pitchFamily="34" charset="-122"/>
-                <a:cs typeface="Arial" panose="020B0604020202020204" pitchFamily="34" charset="0"/>
-              </a:defRPr>
-            </a:lvl1pPr>
-          </a:lstStyle>
-          <a:p>
-            <a:r>
-              <a:rPr lang="en-US" altLang="zh-CN" dirty="0"/>
+          <a:lstStyle/>
+          <a:p>
+            <a:r>
+              <a:rPr sz="2200" b="1">
+                <a:solidFill>
+                  <a:srgbClr val="1A1A1A"/>
+                </a:solidFill>
+                <a:latin typeface="Arial"/>
+                <a:ea typeface="PingFang SC"/>
+              </a:rPr>
               <a:t>问题在没有排班，不在充电位不够</a:t>
             </a:r>
           </a:p>
@@ -4265,84 +4267,90 @@
           </a:p>
         </p:txBody>
       </p:sp>
-      <p:sp>
-        <p:nvSpPr>
-          <p:cNvPr id="4" name="Process Card 1"/>
-          <p:cNvSpPr/>
-          <p:nvPr/>
-        </p:nvSpPr>
-        <p:spPr>
-          <a:xfrm>
-            <a:off x="512064" y="2354580"/>
-            <a:ext cx="2585466" cy="1828800"/>
-          </a:xfrm>
-          <a:prstGeom prst="rect">
-            <a:avLst/>
-          </a:prstGeom>
-          <a:solidFill>
-            <a:srgbClr val="F5F5F5"/>
-          </a:solidFill>
-          <a:ln w="9525">
+      <p:cxnSp>
+        <p:nvCxnSpPr>
+          <p:cNvPr id="4" name="Process Line 1"/>
+          <p:cNvCxnSpPr/>
+          <p:nvPr/>
+        </p:nvCxnSpPr>
+        <p:spPr>
+          <a:xfrm>
+            <a:off x="2519172" y="3423666"/>
+            <a:ext cx="1563624" cy="0"/>
+          </a:xfrm>
+          <a:prstGeom prst="line">
+            <a:avLst/>
+          </a:prstGeom>
+          <a:ln w="28575">
             <a:solidFill>
-              <a:srgbClr val="E5E5E5"/>
+              <a:srgbClr val="BFBFBF"/>
             </a:solidFill>
           </a:ln>
         </p:spPr>
-        <p:txBody>
-          <a:bodyPr rtlCol="0" anchor="t" wrap="square" lIns="182880" rIns="182880" bIns="182880" tIns="411480"/>
-          <a:lstStyle/>
-          <a:p>
-            <a:pPr algn="l">
-              <a:spcAft>
-                <a:spcPts val="600"/>
-              </a:spcAft>
-            </a:pPr>
-            <a:r>
-              <a:rPr sz="1800" b="1">
-                <a:solidFill>
-                  <a:srgbClr val="1A1A1A"/>
-                </a:solidFill>
-                <a:latin typeface="Arial"/>
-                <a:ea typeface="PingFang SC"/>
-              </a:rPr>
-              <a:t>按电量分时段</a:t>
-            </a:r>
-          </a:p>
-          <a:p>
-            <a:pPr algn="l"/>
-            <a:r>
-              <a:rPr sz="1400" b="0">
-                <a:solidFill>
-                  <a:srgbClr val="6B6B6B"/>
-                </a:solidFill>
-                <a:latin typeface="Arial"/>
-                <a:ea typeface="PingFang SC"/>
-              </a:rPr>
-              <a:t>按剩余电量排序，30 分钟一档</a:t>
-            </a:r>
-          </a:p>
-        </p:txBody>
-      </p:sp>
-      <p:sp>
-        <p:nvSpPr>
-          <p:cNvPr id="5" name="Process Number 1"/>
+      </p:cxnSp>
+      <p:cxnSp>
+        <p:nvCxnSpPr>
+          <p:cNvPr id="5" name="Process Line 2"/>
+          <p:cNvCxnSpPr/>
+          <p:nvPr/>
+        </p:nvCxnSpPr>
+        <p:spPr>
+          <a:xfrm>
+            <a:off x="5308092" y="3423666"/>
+            <a:ext cx="1563624" cy="0"/>
+          </a:xfrm>
+          <a:prstGeom prst="line">
+            <a:avLst/>
+          </a:prstGeom>
+          <a:ln w="28575">
+            <a:solidFill>
+              <a:srgbClr val="BFBFBF"/>
+            </a:solidFill>
+          </a:ln>
+        </p:spPr>
+      </p:cxnSp>
+      <p:cxnSp>
+        <p:nvCxnSpPr>
+          <p:cNvPr id="6" name="Process Line 3"/>
+          <p:cNvCxnSpPr/>
+          <p:nvPr/>
+        </p:nvCxnSpPr>
+        <p:spPr>
+          <a:xfrm>
+            <a:off x="8097012" y="3423666"/>
+            <a:ext cx="1563624" cy="0"/>
+          </a:xfrm>
+          <a:prstGeom prst="line">
+            <a:avLst/>
+          </a:prstGeom>
+          <a:ln w="28575">
+            <a:solidFill>
+              <a:srgbClr val="BFBFBF"/>
+            </a:solidFill>
+          </a:ln>
+        </p:spPr>
+      </p:cxnSp>
+      <p:sp>
+        <p:nvSpPr>
+          <p:cNvPr id="7" name="Process Mark 1"/>
           <p:cNvSpPr/>
           <p:nvPr/>
         </p:nvSpPr>
         <p:spPr>
           <a:xfrm>
-            <a:off x="694944" y="2125980"/>
-            <a:ext cx="457200" cy="457200"/>
+            <a:off x="1403604" y="2920746"/>
+            <a:ext cx="1005840" cy="1005840"/>
           </a:xfrm>
           <a:prstGeom prst="ellipse">
             <a:avLst/>
           </a:prstGeom>
           <a:solidFill>
-            <a:srgbClr val="333333"/>
+            <a:srgbClr val="1A1A1A"/>
           </a:solidFill>
           <a:ln>
             <a:noFill/>
           </a:ln>
+          <a:effectLst/>
         </p:spPr>
         <p:txBody>
           <a:bodyPr rtlCol="0" anchor="ctr" wrap="none" lIns="0" rIns="0" tIns="0" bIns="0"/>
@@ -4350,7 +4358,7 @@
           <a:p>
             <a:pPr algn="ctr"/>
             <a:r>
-              <a:rPr sz="1600" b="1">
+              <a:rPr sz="4000" b="1">
                 <a:solidFill>
                   <a:srgbClr val="FFFFFF"/>
                 </a:solidFill>
@@ -4364,82 +4372,97 @@
       </p:sp>
       <p:sp>
         <p:nvSpPr>
-          <p:cNvPr id="6" name="Process Card 2"/>
+          <p:cNvPr id="8" name="Process Title 1"/>
+          <p:cNvSpPr txBox="1"/>
+          <p:nvPr/>
+        </p:nvSpPr>
+        <p:spPr>
+          <a:xfrm>
+            <a:off x="649224" y="4246626"/>
+            <a:ext cx="2514600" cy="381000"/>
+          </a:xfrm>
+          <a:prstGeom prst="rect">
+            <a:avLst/>
+          </a:prstGeom>
+          <a:noFill/>
+        </p:spPr>
+        <p:txBody>
+          <a:bodyPr wrap="square" lIns="0" rIns="0" tIns="0" bIns="0" anchor="t">
+            <a:spAutoFit/>
+          </a:bodyPr>
+          <a:lstStyle/>
+          <a:p>
+            <a:pPr algn="ctr"/>
+            <a:r>
+              <a:rPr sz="2400" b="1">
+                <a:solidFill>
+                  <a:srgbClr val="1A1A1A"/>
+                </a:solidFill>
+                <a:latin typeface="Arial"/>
+                <a:ea typeface="PingFang SC"/>
+              </a:rPr>
+              <a:t>按电量分时段</a:t>
+            </a:r>
+          </a:p>
+        </p:txBody>
+      </p:sp>
+      <p:sp>
+        <p:nvSpPr>
+          <p:cNvPr id="9" name="Process Desc 1"/>
+          <p:cNvSpPr txBox="1"/>
+          <p:nvPr/>
+        </p:nvSpPr>
+        <p:spPr>
+          <a:xfrm>
+            <a:off x="694944" y="4737354"/>
+            <a:ext cx="2423160" cy="571500"/>
+          </a:xfrm>
+          <a:prstGeom prst="rect">
+            <a:avLst/>
+          </a:prstGeom>
+          <a:noFill/>
+        </p:spPr>
+        <p:txBody>
+          <a:bodyPr wrap="square" lIns="0" rIns="0" tIns="0" bIns="0" anchor="t">
+            <a:spAutoFit/>
+          </a:bodyPr>
+          <a:lstStyle/>
+          <a:p>
+            <a:pPr algn="ctr"/>
+            <a:r>
+              <a:rPr sz="1800" b="0">
+                <a:solidFill>
+                  <a:srgbClr val="333333"/>
+                </a:solidFill>
+                <a:latin typeface="Arial"/>
+                <a:ea typeface="PingFang SC"/>
+              </a:rPr>
+              <a:t>按剩余电量排序，30 分钟一档</a:t>
+            </a:r>
+          </a:p>
+        </p:txBody>
+      </p:sp>
+      <p:sp>
+        <p:nvSpPr>
+          <p:cNvPr id="10" name="Process Mark 2"/>
           <p:cNvSpPr/>
           <p:nvPr/>
         </p:nvSpPr>
         <p:spPr>
           <a:xfrm>
-            <a:off x="3371850" y="2354580"/>
-            <a:ext cx="2585466" cy="1828800"/>
-          </a:xfrm>
-          <a:prstGeom prst="rect">
+            <a:off x="4192524" y="2920746"/>
+            <a:ext cx="1005840" cy="1005840"/>
+          </a:xfrm>
+          <a:prstGeom prst="ellipse">
             <a:avLst/>
           </a:prstGeom>
           <a:solidFill>
-            <a:srgbClr val="F5F5F5"/>
-          </a:solidFill>
-          <a:ln w="9525">
-            <a:solidFill>
-              <a:srgbClr val="E5E5E5"/>
-            </a:solidFill>
-          </a:ln>
-        </p:spPr>
-        <p:txBody>
-          <a:bodyPr rtlCol="0" anchor="t" wrap="square" lIns="182880" rIns="182880" bIns="182880" tIns="411480"/>
-          <a:lstStyle/>
-          <a:p>
-            <a:pPr algn="l">
-              <a:spcAft>
-                <a:spcPts val="600"/>
-              </a:spcAft>
-            </a:pPr>
-            <a:r>
-              <a:rPr sz="1800" b="1">
-                <a:solidFill>
-                  <a:srgbClr val="1A1A1A"/>
-                </a:solidFill>
-                <a:latin typeface="Arial"/>
-                <a:ea typeface="PingFang SC"/>
-              </a:rPr>
-              <a:t>推送到终端</a:t>
-            </a:r>
-          </a:p>
-          <a:p>
-            <a:pPr algn="l"/>
-            <a:r>
-              <a:rPr sz="1400" b="0">
-                <a:solidFill>
-                  <a:srgbClr val="6B6B6B"/>
-                </a:solidFill>
-                <a:latin typeface="Arial"/>
-                <a:ea typeface="PingFang SC"/>
-              </a:rPr>
-              <a:t>时段发到手持终端，到点提醒</a:t>
-            </a:r>
-          </a:p>
-        </p:txBody>
-      </p:sp>
-      <p:sp>
-        <p:nvSpPr>
-          <p:cNvPr id="7" name="Process Number 2"/>
-          <p:cNvSpPr/>
-          <p:nvPr/>
-        </p:nvSpPr>
-        <p:spPr>
-          <a:xfrm>
-            <a:off x="3554730" y="2125980"/>
-            <a:ext cx="457200" cy="457200"/>
-          </a:xfrm>
-          <a:prstGeom prst="ellipse">
-            <a:avLst/>
-          </a:prstGeom>
-          <a:solidFill>
-            <a:srgbClr val="333333"/>
+            <a:srgbClr val="1A1A1A"/>
           </a:solidFill>
           <a:ln>
             <a:noFill/>
           </a:ln>
+          <a:effectLst/>
         </p:spPr>
         <p:txBody>
           <a:bodyPr rtlCol="0" anchor="ctr" wrap="none" lIns="0" rIns="0" tIns="0" bIns="0"/>
@@ -4447,7 +4470,7 @@
           <a:p>
             <a:pPr algn="ctr"/>
             <a:r>
-              <a:rPr sz="1600" b="1">
+              <a:rPr sz="4000" b="1">
                 <a:solidFill>
                   <a:srgbClr val="FFFFFF"/>
                 </a:solidFill>
@@ -4461,82 +4484,97 @@
       </p:sp>
       <p:sp>
         <p:nvSpPr>
-          <p:cNvPr id="8" name="Process Card 3"/>
+          <p:cNvPr id="11" name="Process Title 2"/>
+          <p:cNvSpPr txBox="1"/>
+          <p:nvPr/>
+        </p:nvSpPr>
+        <p:spPr>
+          <a:xfrm>
+            <a:off x="3438144" y="4246626"/>
+            <a:ext cx="2514600" cy="381000"/>
+          </a:xfrm>
+          <a:prstGeom prst="rect">
+            <a:avLst/>
+          </a:prstGeom>
+          <a:noFill/>
+        </p:spPr>
+        <p:txBody>
+          <a:bodyPr wrap="square" lIns="0" rIns="0" tIns="0" bIns="0" anchor="t">
+            <a:spAutoFit/>
+          </a:bodyPr>
+          <a:lstStyle/>
+          <a:p>
+            <a:pPr algn="ctr"/>
+            <a:r>
+              <a:rPr sz="2400" b="1">
+                <a:solidFill>
+                  <a:srgbClr val="1A1A1A"/>
+                </a:solidFill>
+                <a:latin typeface="Arial"/>
+                <a:ea typeface="PingFang SC"/>
+              </a:rPr>
+              <a:t>推送到终端</a:t>
+            </a:r>
+          </a:p>
+        </p:txBody>
+      </p:sp>
+      <p:sp>
+        <p:nvSpPr>
+          <p:cNvPr id="12" name="Process Desc 2"/>
+          <p:cNvSpPr txBox="1"/>
+          <p:nvPr/>
+        </p:nvSpPr>
+        <p:spPr>
+          <a:xfrm>
+            <a:off x="3483863" y="4737354"/>
+            <a:ext cx="2423160" cy="571500"/>
+          </a:xfrm>
+          <a:prstGeom prst="rect">
+            <a:avLst/>
+          </a:prstGeom>
+          <a:noFill/>
+        </p:spPr>
+        <p:txBody>
+          <a:bodyPr wrap="square" lIns="0" rIns="0" tIns="0" bIns="0" anchor="t">
+            <a:spAutoFit/>
+          </a:bodyPr>
+          <a:lstStyle/>
+          <a:p>
+            <a:pPr algn="ctr"/>
+            <a:r>
+              <a:rPr sz="1800" b="0">
+                <a:solidFill>
+                  <a:srgbClr val="333333"/>
+                </a:solidFill>
+                <a:latin typeface="Arial"/>
+                <a:ea typeface="PingFang SC"/>
+              </a:rPr>
+              <a:t>时段发到手持终端，到点提醒</a:t>
+            </a:r>
+          </a:p>
+        </p:txBody>
+      </p:sp>
+      <p:sp>
+        <p:nvSpPr>
+          <p:cNvPr id="13" name="Process Mark 3"/>
           <p:cNvSpPr/>
           <p:nvPr/>
         </p:nvSpPr>
         <p:spPr>
           <a:xfrm>
-            <a:off x="6231636" y="2354580"/>
-            <a:ext cx="2585466" cy="1828800"/>
-          </a:xfrm>
-          <a:prstGeom prst="rect">
+            <a:off x="6981444" y="2920746"/>
+            <a:ext cx="1005840" cy="1005840"/>
+          </a:xfrm>
+          <a:prstGeom prst="ellipse">
             <a:avLst/>
           </a:prstGeom>
           <a:solidFill>
-            <a:srgbClr val="F5F5F5"/>
-          </a:solidFill>
-          <a:ln w="9525">
-            <a:solidFill>
-              <a:srgbClr val="E5E5E5"/>
-            </a:solidFill>
-          </a:ln>
-        </p:spPr>
-        <p:txBody>
-          <a:bodyPr rtlCol="0" anchor="t" wrap="square" lIns="182880" rIns="182880" bIns="182880" tIns="411480"/>
-          <a:lstStyle/>
-          <a:p>
-            <a:pPr algn="l">
-              <a:spcAft>
-                <a:spcPts val="600"/>
-              </a:spcAft>
-            </a:pPr>
-            <a:r>
-              <a:rPr sz="1800" b="1">
-                <a:solidFill>
-                  <a:srgbClr val="1A1A1A"/>
-                </a:solidFill>
-                <a:latin typeface="Arial"/>
-                <a:ea typeface="PingFang SC"/>
-              </a:rPr>
-              <a:t>低电量优先</a:t>
-            </a:r>
-          </a:p>
-          <a:p>
-            <a:pPr algn="l"/>
-            <a:r>
-              <a:rPr sz="1400" b="0">
-                <a:solidFill>
-                  <a:srgbClr val="6B6B6B"/>
-                </a:solidFill>
-                <a:latin typeface="Arial"/>
-                <a:ea typeface="PingFang SC"/>
-              </a:rPr>
-              <a:t>电量低于 20% 的车直接插队</a:t>
-            </a:r>
-          </a:p>
-        </p:txBody>
-      </p:sp>
-      <p:sp>
-        <p:nvSpPr>
-          <p:cNvPr id="9" name="Process Number 3"/>
-          <p:cNvSpPr/>
-          <p:nvPr/>
-        </p:nvSpPr>
-        <p:spPr>
-          <a:xfrm>
-            <a:off x="6414516" y="2125980"/>
-            <a:ext cx="457200" cy="457200"/>
-          </a:xfrm>
-          <a:prstGeom prst="ellipse">
-            <a:avLst/>
-          </a:prstGeom>
-          <a:solidFill>
-            <a:srgbClr val="333333"/>
+            <a:srgbClr val="1A1A1A"/>
           </a:solidFill>
           <a:ln>
             <a:noFill/>
           </a:ln>
+          <a:effectLst/>
         </p:spPr>
         <p:txBody>
           <a:bodyPr rtlCol="0" anchor="ctr" wrap="none" lIns="0" rIns="0" tIns="0" bIns="0"/>
@@ -4544,7 +4582,7 @@
           <a:p>
             <a:pPr algn="ctr"/>
             <a:r>
-              <a:rPr sz="1600" b="1">
+              <a:rPr sz="4000" b="1">
                 <a:solidFill>
                   <a:srgbClr val="FFFFFF"/>
                 </a:solidFill>
@@ -4558,82 +4596,97 @@
       </p:sp>
       <p:sp>
         <p:nvSpPr>
-          <p:cNvPr id="10" name="Process Card 4"/>
+          <p:cNvPr id="14" name="Process Title 3"/>
+          <p:cNvSpPr txBox="1"/>
+          <p:nvPr/>
+        </p:nvSpPr>
+        <p:spPr>
+          <a:xfrm>
+            <a:off x="6227064" y="4246626"/>
+            <a:ext cx="2514600" cy="381000"/>
+          </a:xfrm>
+          <a:prstGeom prst="rect">
+            <a:avLst/>
+          </a:prstGeom>
+          <a:noFill/>
+        </p:spPr>
+        <p:txBody>
+          <a:bodyPr wrap="square" lIns="0" rIns="0" tIns="0" bIns="0" anchor="t">
+            <a:spAutoFit/>
+          </a:bodyPr>
+          <a:lstStyle/>
+          <a:p>
+            <a:pPr algn="ctr"/>
+            <a:r>
+              <a:rPr sz="2400" b="1">
+                <a:solidFill>
+                  <a:srgbClr val="1A1A1A"/>
+                </a:solidFill>
+                <a:latin typeface="Arial"/>
+                <a:ea typeface="PingFang SC"/>
+              </a:rPr>
+              <a:t>低电量优先</a:t>
+            </a:r>
+          </a:p>
+        </p:txBody>
+      </p:sp>
+      <p:sp>
+        <p:nvSpPr>
+          <p:cNvPr id="15" name="Process Desc 3"/>
+          <p:cNvSpPr txBox="1"/>
+          <p:nvPr/>
+        </p:nvSpPr>
+        <p:spPr>
+          <a:xfrm>
+            <a:off x="6272784" y="4737354"/>
+            <a:ext cx="2423160" cy="571500"/>
+          </a:xfrm>
+          <a:prstGeom prst="rect">
+            <a:avLst/>
+          </a:prstGeom>
+          <a:noFill/>
+        </p:spPr>
+        <p:txBody>
+          <a:bodyPr wrap="square" lIns="0" rIns="0" tIns="0" bIns="0" anchor="t">
+            <a:spAutoFit/>
+          </a:bodyPr>
+          <a:lstStyle/>
+          <a:p>
+            <a:pPr algn="ctr"/>
+            <a:r>
+              <a:rPr sz="1800" b="0">
+                <a:solidFill>
+                  <a:srgbClr val="333333"/>
+                </a:solidFill>
+                <a:latin typeface="Arial"/>
+                <a:ea typeface="PingFang SC"/>
+              </a:rPr>
+              <a:t>电量低于 20% 的车直接插队</a:t>
+            </a:r>
+          </a:p>
+        </p:txBody>
+      </p:sp>
+      <p:sp>
+        <p:nvSpPr>
+          <p:cNvPr id="16" name="Process Mark 4"/>
           <p:cNvSpPr/>
           <p:nvPr/>
         </p:nvSpPr>
         <p:spPr>
           <a:xfrm>
-            <a:off x="9091422" y="2354580"/>
-            <a:ext cx="2585466" cy="1828800"/>
-          </a:xfrm>
-          <a:prstGeom prst="rect">
+            <a:off x="9770363" y="2920746"/>
+            <a:ext cx="1005840" cy="1005840"/>
+          </a:xfrm>
+          <a:prstGeom prst="ellipse">
             <a:avLst/>
           </a:prstGeom>
           <a:solidFill>
-            <a:srgbClr val="F5F5F5"/>
-          </a:solidFill>
-          <a:ln w="9525">
-            <a:solidFill>
-              <a:srgbClr val="E5E5E5"/>
-            </a:solidFill>
-          </a:ln>
-        </p:spPr>
-        <p:txBody>
-          <a:bodyPr rtlCol="0" anchor="t" wrap="square" lIns="182880" rIns="182880" bIns="182880" tIns="411480"/>
-          <a:lstStyle/>
-          <a:p>
-            <a:pPr algn="l">
-              <a:spcAft>
-                <a:spcPts val="600"/>
-              </a:spcAft>
-            </a:pPr>
-            <a:r>
-              <a:rPr sz="1800" b="1">
-                <a:solidFill>
-                  <a:srgbClr val="1A1A1A"/>
-                </a:solidFill>
-                <a:latin typeface="Arial"/>
-                <a:ea typeface="PingFang SC"/>
-              </a:rPr>
-              <a:t>早会看执行</a:t>
-            </a:r>
-          </a:p>
-          <a:p>
-            <a:pPr algn="l"/>
-            <a:r>
-              <a:rPr sz="1400" b="0">
-                <a:solidFill>
-                  <a:srgbClr val="6B6B6B"/>
-                </a:solidFill>
-                <a:latin typeface="Arial"/>
-                <a:ea typeface="PingFang SC"/>
-              </a:rPr>
-              <a:t>班组长每天查前一天执行率</a:t>
-            </a:r>
-          </a:p>
-        </p:txBody>
-      </p:sp>
-      <p:sp>
-        <p:nvSpPr>
-          <p:cNvPr id="11" name="Process Number 4"/>
-          <p:cNvSpPr/>
-          <p:nvPr/>
-        </p:nvSpPr>
-        <p:spPr>
-          <a:xfrm>
-            <a:off x="9274302" y="2125980"/>
-            <a:ext cx="457200" cy="457200"/>
-          </a:xfrm>
-          <a:prstGeom prst="ellipse">
-            <a:avLst/>
-          </a:prstGeom>
-          <a:solidFill>
-            <a:srgbClr val="333333"/>
+            <a:srgbClr val="1A1A1A"/>
           </a:solidFill>
           <a:ln>
             <a:noFill/>
           </a:ln>
+          <a:effectLst/>
         </p:spPr>
         <p:txBody>
           <a:bodyPr rtlCol="0" anchor="ctr" wrap="none" lIns="0" rIns="0" tIns="0" bIns="0"/>
@@ -4641,7 +4694,7 @@
           <a:p>
             <a:pPr algn="ctr"/>
             <a:r>
-              <a:rPr sz="1600" b="1">
+              <a:rPr sz="4000" b="1">
                 <a:solidFill>
                   <a:srgbClr val="FFFFFF"/>
                 </a:solidFill>
@@ -4655,16 +4708,86 @@
       </p:sp>
       <p:sp>
         <p:nvSpPr>
-          <p:cNvPr id="12" name="Caption Bar"/>
-          <p:cNvSpPr txBox="1">
-            <a:spLocks noChangeArrowheads="1"/>
-          </p:cNvSpPr>
-          <p:nvPr/>
-        </p:nvSpPr>
-        <p:spPr bwMode="auto">
-          <a:xfrm>
-            <a:off x="155575" y="5379048"/>
-            <a:ext cx="11874874" cy="1097952"/>
+          <p:cNvPr id="17" name="Process Title 4"/>
+          <p:cNvSpPr txBox="1"/>
+          <p:nvPr/>
+        </p:nvSpPr>
+        <p:spPr>
+          <a:xfrm>
+            <a:off x="9015984" y="4246626"/>
+            <a:ext cx="2514600" cy="381000"/>
+          </a:xfrm>
+          <a:prstGeom prst="rect">
+            <a:avLst/>
+          </a:prstGeom>
+          <a:noFill/>
+        </p:spPr>
+        <p:txBody>
+          <a:bodyPr wrap="square" lIns="0" rIns="0" tIns="0" bIns="0" anchor="t">
+            <a:spAutoFit/>
+          </a:bodyPr>
+          <a:lstStyle/>
+          <a:p>
+            <a:pPr algn="ctr"/>
+            <a:r>
+              <a:rPr sz="2400" b="1">
+                <a:solidFill>
+                  <a:srgbClr val="1A1A1A"/>
+                </a:solidFill>
+                <a:latin typeface="Arial"/>
+                <a:ea typeface="PingFang SC"/>
+              </a:rPr>
+              <a:t>早会看执行</a:t>
+            </a:r>
+          </a:p>
+        </p:txBody>
+      </p:sp>
+      <p:sp>
+        <p:nvSpPr>
+          <p:cNvPr id="18" name="Process Desc 4"/>
+          <p:cNvSpPr txBox="1"/>
+          <p:nvPr/>
+        </p:nvSpPr>
+        <p:spPr>
+          <a:xfrm>
+            <a:off x="9061704" y="4737354"/>
+            <a:ext cx="2423160" cy="571500"/>
+          </a:xfrm>
+          <a:prstGeom prst="rect">
+            <a:avLst/>
+          </a:prstGeom>
+          <a:noFill/>
+        </p:spPr>
+        <p:txBody>
+          <a:bodyPr wrap="square" lIns="0" rIns="0" tIns="0" bIns="0" anchor="t">
+            <a:spAutoFit/>
+          </a:bodyPr>
+          <a:lstStyle/>
+          <a:p>
+            <a:pPr algn="ctr"/>
+            <a:r>
+              <a:rPr sz="1800" b="0">
+                <a:solidFill>
+                  <a:srgbClr val="333333"/>
+                </a:solidFill>
+                <a:latin typeface="Arial"/>
+                <a:ea typeface="PingFang SC"/>
+              </a:rPr>
+              <a:t>早会查昨日执行率</a:t>
+            </a:r>
+          </a:p>
+        </p:txBody>
+      </p:sp>
+      <p:sp>
+        <p:nvSpPr>
+          <p:cNvPr id="19" name="Lead Accent"/>
+          <p:cNvSpPr/>
+          <p:nvPr/>
+        </p:nvSpPr>
+        <p:spPr>
+          <a:xfrm>
+            <a:off x="512064" y="1243584"/>
+            <a:ext cx="73152" cy="402336"/>
           </a:xfrm>
           <a:prstGeom prst="rect">
             <a:avLst/>
@@ -4672,45 +4795,49 @@
           <a:solidFill>
             <a:srgbClr val="DB011C"/>
           </a:solidFill>
-          <a:ln w="9525" cap="flat" cmpd="sng" algn="ctr">
-            <a:solidFill>
-              <a:schemeClr val="tx1"/>
-            </a:solidFill>
-            <a:prstDash val="solid"/>
-            <a:round/>
-            <a:headEnd type="none" w="med" len="med"/>
-            <a:tailEnd type="none" w="med" len="med"/>
+          <a:ln>
+            <a:noFill/>
           </a:ln>
           <a:effectLst/>
         </p:spPr>
         <p:txBody>
-          <a:bodyPr vert="horz" wrap="square" lIns="91440" tIns="45720" rIns="91440" bIns="45720" numCol="1" rtlCol="0" anchor="ctr" anchorCtr="0" compatLnSpc="1">
-            <a:prstTxWarp prst="textNoShape">
-              <a:avLst/>
-            </a:prstTxWarp>
+          <a:bodyPr rtlCol="0" anchor="ctr"/>
+          <a:lstStyle/>
+          <a:p>
+            <a:pPr algn="ctr"/>
+          </a:p>
+        </p:txBody>
+      </p:sp>
+      <p:sp>
+        <p:nvSpPr>
+          <p:cNvPr id="20" name="Lead"/>
+          <p:cNvSpPr txBox="1"/>
+          <p:nvPr/>
+        </p:nvSpPr>
+        <p:spPr>
+          <a:xfrm>
+            <a:off x="731520" y="1188720"/>
+            <a:ext cx="10936224" cy="512064"/>
+          </a:xfrm>
+          <a:prstGeom prst="rect">
+            <a:avLst/>
+          </a:prstGeom>
+          <a:noFill/>
+        </p:spPr>
+        <p:txBody>
+          <a:bodyPr wrap="square" lIns="0" rIns="0" tIns="0" bIns="0" anchor="ctr">
+            <a:spAutoFit/>
           </a:bodyPr>
-          <a:lstStyle>
-            <a:defPPr>
-              <a:defRPr lang="en-US"/>
-            </a:defPPr>
-            <a:lvl1pPr marL="342900" indent="-342900" eaLnBrk="0" hangingPunct="0">
-              <a:lnSpc>
-                <a:spcPct val="150000"/>
-              </a:lnSpc>
-              <a:buFont typeface="Wingdings" panose="05000000000000000000" pitchFamily="2" charset="2"/>
-              <a:buChar char="v"/>
-              <a:defRPr sz="1400" b="0">
-                <a:solidFill>
-                  <a:schemeClr val="bg1"/>
-                </a:solidFill>
-                <a:ea typeface="微软雅黑" panose="020B0503020204020204" pitchFamily="34" charset="-122"/>
-                <a:cs typeface="Arial" panose="020B0604020202020204" pitchFamily="34" charset="0"/>
-              </a:defRPr>
-            </a:lvl1pPr>
-          </a:lstStyle>
-          <a:p>
-            <a:r>
-              <a:rPr lang="en-US" altLang="zh-CN" dirty="0"/>
+          <a:lstStyle/>
+          <a:p>
+            <a:r>
+              <a:rPr sz="2200" b="1">
+                <a:solidFill>
+                  <a:srgbClr val="1A1A1A"/>
+                </a:solidFill>
+                <a:latin typeface="Arial"/>
+                <a:ea typeface="PingFang SC"/>
+              </a:rPr>
               <a:t>未新增采购：IT 内部配置，复用现有手持终端</a:t>
             </a:r>
           </a:p>
@@ -4784,7 +4911,7 @@
         </p:nvSpPr>
         <p:spPr>
           <a:xfrm>
-            <a:off x="7266432" y="1216152"/>
+            <a:off x="7266432" y="1901952"/>
             <a:ext cx="182880" cy="182880"/>
           </a:xfrm>
           <a:prstGeom prst="ellipse">
@@ -4816,7 +4943,7 @@
         </p:nvSpPr>
         <p:spPr>
           <a:xfrm>
-            <a:off x="7310324" y="1271016"/>
+            <a:off x="7310324" y="1956816"/>
             <a:ext cx="98754" cy="73152"/>
           </a:xfrm>
           <a:custGeom>
@@ -4863,7 +4990,7 @@
         </p:nvSpPr>
         <p:spPr>
           <a:xfrm>
-            <a:off x="7531608" y="1188720"/>
+            <a:off x="7531608" y="1874520"/>
             <a:ext cx="548640" cy="237744"/>
           </a:xfrm>
           <a:prstGeom prst="rect">
@@ -4898,7 +5025,7 @@
         </p:nvSpPr>
         <p:spPr>
           <a:xfrm>
-            <a:off x="8363712" y="1216152"/>
+            <a:off x="8363712" y="1901952"/>
             <a:ext cx="182880" cy="182880"/>
           </a:xfrm>
           <a:prstGeom prst="ellipse">
@@ -4930,7 +5057,7 @@
         </p:nvSpPr>
         <p:spPr>
           <a:xfrm>
-            <a:off x="8628888" y="1188720"/>
+            <a:off x="8628888" y="1874520"/>
             <a:ext cx="548640" cy="237744"/>
           </a:xfrm>
           <a:prstGeom prst="rect">
@@ -4965,7 +5092,7 @@
         </p:nvSpPr>
         <p:spPr>
           <a:xfrm>
-            <a:off x="9460992" y="1216152"/>
+            <a:off x="9460992" y="1901952"/>
             <a:ext cx="182880" cy="182880"/>
           </a:xfrm>
           <a:prstGeom prst="ellipse">
@@ -4997,7 +5124,7 @@
         </p:nvSpPr>
         <p:spPr>
           <a:xfrm>
-            <a:off x="9726168" y="1188720"/>
+            <a:off x="9726168" y="1874520"/>
             <a:ext cx="548640" cy="237744"/>
           </a:xfrm>
           <a:prstGeom prst="rect">
@@ -5032,7 +5159,7 @@
         </p:nvSpPr>
         <p:spPr>
           <a:xfrm>
-            <a:off x="10530840" y="1188720"/>
+            <a:off x="10530840" y="1874520"/>
             <a:ext cx="237744" cy="237744"/>
           </a:xfrm>
           <a:prstGeom prst="diamond">
@@ -5062,7 +5189,7 @@
         </p:nvSpPr>
         <p:spPr>
           <a:xfrm>
-            <a:off x="10823448" y="1188720"/>
+            <a:off x="10823448" y="1874520"/>
             <a:ext cx="853440" cy="237744"/>
           </a:xfrm>
           <a:prstGeom prst="rect">
@@ -5097,7 +5224,7 @@
         </p:nvCxnSpPr>
         <p:spPr>
           <a:xfrm>
-            <a:off x="1804797" y="3246120"/>
+            <a:off x="1804797" y="4088892"/>
             <a:ext cx="8579358" cy="0"/>
           </a:xfrm>
           <a:prstGeom prst="line">
@@ -5119,7 +5246,7 @@
         </p:nvSpPr>
         <p:spPr>
           <a:xfrm>
-            <a:off x="1658493" y="3099816"/>
+            <a:off x="1658493" y="3942588"/>
             <a:ext cx="292608" cy="292608"/>
           </a:xfrm>
           <a:prstGeom prst="ellipse">
@@ -5151,7 +5278,7 @@
         </p:nvSpPr>
         <p:spPr>
           <a:xfrm>
-            <a:off x="1728719" y="3187599"/>
+            <a:off x="1728719" y="4030371"/>
             <a:ext cx="158008" cy="117042"/>
           </a:xfrm>
           <a:custGeom>
@@ -5198,7 +5325,7 @@
         </p:nvSpPr>
         <p:spPr>
           <a:xfrm>
-            <a:off x="4518279" y="3099816"/>
+            <a:off x="4518279" y="3942588"/>
             <a:ext cx="292608" cy="292608"/>
           </a:xfrm>
           <a:prstGeom prst="ellipse">
@@ -5230,7 +5357,7 @@
         </p:nvSpPr>
         <p:spPr>
           <a:xfrm>
-            <a:off x="4588505" y="3187599"/>
+            <a:off x="4588505" y="4030371"/>
             <a:ext cx="158008" cy="117042"/>
           </a:xfrm>
           <a:custGeom>
@@ -5277,7 +5404,7 @@
         </p:nvSpPr>
         <p:spPr>
           <a:xfrm>
-            <a:off x="7304913" y="3026664"/>
+            <a:off x="7304913" y="3869436"/>
             <a:ext cx="438912" cy="438912"/>
           </a:xfrm>
           <a:prstGeom prst="diamond">
@@ -5309,7 +5436,7 @@
         </p:nvSpPr>
         <p:spPr>
           <a:xfrm>
-            <a:off x="7438782" y="3180284"/>
+            <a:off x="7438782" y="4023056"/>
             <a:ext cx="177758" cy="131672"/>
           </a:xfrm>
           <a:custGeom>
@@ -5356,7 +5483,7 @@
         </p:nvSpPr>
         <p:spPr>
           <a:xfrm>
-            <a:off x="10237851" y="3099816"/>
+            <a:off x="10237851" y="3942588"/>
             <a:ext cx="292608" cy="292608"/>
           </a:xfrm>
           <a:prstGeom prst="ellipse">
@@ -5388,7 +5515,7 @@
         </p:nvSpPr>
         <p:spPr>
           <a:xfrm>
-            <a:off x="10308077" y="3187599"/>
+            <a:off x="10308077" y="4030371"/>
             <a:ext cx="158008" cy="117042"/>
           </a:xfrm>
           <a:custGeom>
@@ -5435,7 +5562,7 @@
         </p:nvSpPr>
         <p:spPr>
           <a:xfrm>
-            <a:off x="512064" y="2331720"/>
+            <a:off x="512064" y="3174492"/>
             <a:ext cx="2585466" cy="320040"/>
           </a:xfrm>
           <a:prstGeom prst="rect">
@@ -5451,7 +5578,7 @@
           <a:p>
             <a:pPr algn="ctr"/>
             <a:r>
-              <a:rPr sz="1200" b="1">
+              <a:rPr sz="1400" b="1">
                 <a:solidFill>
                   <a:srgbClr val="6B6B6B"/>
                 </a:solidFill>
@@ -5471,7 +5598,7 @@
         </p:nvSpPr>
         <p:spPr>
           <a:xfrm>
-            <a:off x="3371850" y="2331720"/>
+            <a:off x="3371850" y="3174492"/>
             <a:ext cx="2585466" cy="320040"/>
           </a:xfrm>
           <a:prstGeom prst="rect">
@@ -5487,7 +5614,7 @@
           <a:p>
             <a:pPr algn="ctr"/>
             <a:r>
-              <a:rPr sz="1200" b="1">
+              <a:rPr sz="1400" b="1">
                 <a:solidFill>
                   <a:srgbClr val="6B6B6B"/>
                 </a:solidFill>
@@ -5507,7 +5634,7 @@
         </p:nvSpPr>
         <p:spPr>
           <a:xfrm>
-            <a:off x="6231636" y="2331720"/>
+            <a:off x="6231636" y="3174492"/>
             <a:ext cx="2585466" cy="320040"/>
           </a:xfrm>
           <a:prstGeom prst="rect">
@@ -5523,7 +5650,7 @@
           <a:p>
             <a:pPr algn="ctr"/>
             <a:r>
-              <a:rPr sz="1200" b="1">
+              <a:rPr sz="1400" b="1">
                 <a:solidFill>
                   <a:srgbClr val="6B6B6B"/>
                 </a:solidFill>
@@ -5543,7 +5670,7 @@
         </p:nvSpPr>
         <p:spPr>
           <a:xfrm>
-            <a:off x="9091422" y="2331720"/>
+            <a:off x="9091422" y="3174492"/>
             <a:ext cx="2585466" cy="320040"/>
           </a:xfrm>
           <a:prstGeom prst="rect">
@@ -5559,7 +5686,7 @@
           <a:p>
             <a:pPr algn="ctr"/>
             <a:r>
-              <a:rPr sz="1200" b="1">
+              <a:rPr sz="1400" b="1">
                 <a:solidFill>
                   <a:srgbClr val="6B6B6B"/>
                 </a:solidFill>
@@ -5579,8 +5706,8 @@
         </p:nvSpPr>
         <p:spPr>
           <a:xfrm>
-            <a:off x="512064" y="3794760"/>
-            <a:ext cx="2585466" cy="1325880"/>
+            <a:off x="512064" y="4637532"/>
+            <a:ext cx="2585466" cy="655319"/>
           </a:xfrm>
           <a:prstGeom prst="rect">
             <a:avLst/>
@@ -5595,7 +5722,7 @@
           <a:p>
             <a:pPr algn="ctr"/>
             <a:r>
-              <a:rPr sz="1600" b="1">
+              <a:rPr sz="2000" b="1">
                 <a:solidFill>
                   <a:srgbClr val="1A1A1A"/>
                 </a:solidFill>
@@ -5612,7 +5739,7 @@
               </a:spcBef>
             </a:pPr>
             <a:r>
-              <a:rPr sz="1400" b="0">
+              <a:rPr sz="1600" b="0">
                 <a:solidFill>
                   <a:srgbClr val="6B6B6B"/>
                 </a:solidFill>
@@ -5632,8 +5759,8 @@
         </p:nvSpPr>
         <p:spPr>
           <a:xfrm>
-            <a:off x="3371850" y="3794760"/>
-            <a:ext cx="2585466" cy="1325880"/>
+            <a:off x="3371850" y="4637532"/>
+            <a:ext cx="2585466" cy="655319"/>
           </a:xfrm>
           <a:prstGeom prst="rect">
             <a:avLst/>
@@ -5648,7 +5775,7 @@
           <a:p>
             <a:pPr algn="ctr"/>
             <a:r>
-              <a:rPr sz="1600" b="1">
+              <a:rPr sz="2000" b="1">
                 <a:solidFill>
                   <a:srgbClr val="1A1A1A"/>
                 </a:solidFill>
@@ -5665,7 +5792,7 @@
               </a:spcBef>
             </a:pPr>
             <a:r>
-              <a:rPr sz="1400" b="0">
+              <a:rPr sz="1600" b="0">
                 <a:solidFill>
                   <a:srgbClr val="6B6B6B"/>
                 </a:solidFill>
@@ -5685,8 +5812,8 @@
         </p:nvSpPr>
         <p:spPr>
           <a:xfrm>
-            <a:off x="6231636" y="3794760"/>
-            <a:ext cx="2585466" cy="1325880"/>
+            <a:off x="6231636" y="4637532"/>
+            <a:ext cx="2585466" cy="655319"/>
           </a:xfrm>
           <a:prstGeom prst="rect">
             <a:avLst/>
@@ -5701,7 +5828,7 @@
           <a:p>
             <a:pPr algn="ctr"/>
             <a:r>
-              <a:rPr sz="1800" b="1">
+              <a:rPr sz="2200" b="1">
                 <a:solidFill>
                   <a:srgbClr val="1A1A1A"/>
                 </a:solidFill>
@@ -5718,7 +5845,7 @@
               </a:spcBef>
             </a:pPr>
             <a:r>
-              <a:rPr sz="1400" b="0">
+              <a:rPr sz="1600" b="0">
                 <a:solidFill>
                   <a:srgbClr val="6B6B6B"/>
                 </a:solidFill>
@@ -5738,8 +5865,8 @@
         </p:nvSpPr>
         <p:spPr>
           <a:xfrm>
-            <a:off x="9091422" y="3794760"/>
-            <a:ext cx="2585466" cy="1325880"/>
+            <a:off x="9091422" y="4637532"/>
+            <a:ext cx="2585466" cy="655319"/>
           </a:xfrm>
           <a:prstGeom prst="rect">
             <a:avLst/>
@@ -5754,7 +5881,7 @@
           <a:p>
             <a:pPr algn="ctr"/>
             <a:r>
-              <a:rPr sz="1600" b="1">
+              <a:rPr sz="2000" b="1">
                 <a:solidFill>
                   <a:srgbClr val="1A1A1A"/>
                 </a:solidFill>
@@ -5771,7 +5898,7 @@
               </a:spcBef>
             </a:pPr>
             <a:r>
-              <a:rPr sz="1400" b="0">
+              <a:rPr sz="1600" b="0">
                 <a:solidFill>
                   <a:srgbClr val="6B6B6B"/>
                 </a:solidFill>
@@ -5785,16 +5912,14 @@
       </p:sp>
       <p:sp>
         <p:nvSpPr>
-          <p:cNvPr id="30" name="Caption Bar"/>
-          <p:cNvSpPr txBox="1">
-            <a:spLocks noChangeArrowheads="1"/>
-          </p:cNvSpPr>
-          <p:nvPr/>
-        </p:nvSpPr>
-        <p:spPr bwMode="auto">
-          <a:xfrm>
-            <a:off x="155575" y="5379048"/>
-            <a:ext cx="11874874" cy="1097952"/>
+          <p:cNvPr id="30" name="Lead Accent"/>
+          <p:cNvSpPr/>
+          <p:nvPr/>
+        </p:nvSpPr>
+        <p:spPr>
+          <a:xfrm>
+            <a:off x="512064" y="1243584"/>
+            <a:ext cx="73152" cy="402336"/>
           </a:xfrm>
           <a:prstGeom prst="rect">
             <a:avLst/>
@@ -5802,45 +5927,49 @@
           <a:solidFill>
             <a:srgbClr val="DB011C"/>
           </a:solidFill>
-          <a:ln w="9525" cap="flat" cmpd="sng" algn="ctr">
-            <a:solidFill>
-              <a:schemeClr val="tx1"/>
-            </a:solidFill>
-            <a:prstDash val="solid"/>
-            <a:round/>
-            <a:headEnd type="none" w="med" len="med"/>
-            <a:tailEnd type="none" w="med" len="med"/>
+          <a:ln>
+            <a:noFill/>
           </a:ln>
           <a:effectLst/>
         </p:spPr>
         <p:txBody>
-          <a:bodyPr vert="horz" wrap="square" lIns="91440" tIns="45720" rIns="91440" bIns="45720" numCol="1" rtlCol="0" anchor="ctr" anchorCtr="0" compatLnSpc="1">
-            <a:prstTxWarp prst="textNoShape">
-              <a:avLst/>
-            </a:prstTxWarp>
+          <a:bodyPr rtlCol="0" anchor="ctr"/>
+          <a:lstStyle/>
+          <a:p>
+            <a:pPr algn="ctr"/>
+          </a:p>
+        </p:txBody>
+      </p:sp>
+      <p:sp>
+        <p:nvSpPr>
+          <p:cNvPr id="31" name="Lead"/>
+          <p:cNvSpPr txBox="1"/>
+          <p:nvPr/>
+        </p:nvSpPr>
+        <p:spPr>
+          <a:xfrm>
+            <a:off x="731520" y="1188720"/>
+            <a:ext cx="10936224" cy="512064"/>
+          </a:xfrm>
+          <a:prstGeom prst="rect">
+            <a:avLst/>
+          </a:prstGeom>
+          <a:noFill/>
+        </p:spPr>
+        <p:txBody>
+          <a:bodyPr wrap="square" lIns="0" rIns="0" tIns="0" bIns="0" anchor="ctr">
+            <a:spAutoFit/>
           </a:bodyPr>
-          <a:lstStyle>
-            <a:defPPr>
-              <a:defRPr lang="en-US"/>
-            </a:defPPr>
-            <a:lvl1pPr marL="342900" indent="-342900" eaLnBrk="0" hangingPunct="0">
-              <a:lnSpc>
-                <a:spcPct val="150000"/>
-              </a:lnSpc>
-              <a:buFont typeface="Wingdings" panose="05000000000000000000" pitchFamily="2" charset="2"/>
-              <a:buChar char="v"/>
-              <a:defRPr sz="1400" b="0">
-                <a:solidFill>
-                  <a:schemeClr val="bg1"/>
-                </a:solidFill>
-                <a:ea typeface="微软雅黑" panose="020B0503020204020204" pitchFamily="34" charset="-122"/>
-                <a:cs typeface="Arial" panose="020B0604020202020204" pitchFamily="34" charset="0"/>
-              </a:defRPr>
-            </a:lvl1pPr>
-          </a:lstStyle>
-          <a:p>
-            <a:r>
-              <a:rPr lang="en-US" altLang="zh-CN" dirty="0"/>
+          <a:lstStyle/>
+          <a:p>
+            <a:r>
+              <a:rPr sz="2200" b="1">
+                <a:solidFill>
+                  <a:srgbClr val="1A1A1A"/>
+                </a:solidFill>
+                <a:latin typeface="Arial"/>
+                <a:ea typeface="PingFang SC"/>
+              </a:rPr>
               <a:t>试点按计划完成，9 月排班执行率 96%</a:t>
             </a:r>
           </a:p>
@@ -5914,8 +6043,8 @@
         </p:nvSpPr>
         <p:spPr>
           <a:xfrm>
-            <a:off x="512064" y="1188720"/>
-            <a:ext cx="2482596" cy="54864"/>
+            <a:off x="512064" y="1874520"/>
+            <a:ext cx="2482596" cy="73152"/>
           </a:xfrm>
           <a:prstGeom prst="rect">
             <a:avLst/>
@@ -5944,8 +6073,8 @@
         </p:nvSpPr>
         <p:spPr>
           <a:xfrm>
-            <a:off x="512064" y="1417320"/>
-            <a:ext cx="2482596" cy="274320"/>
+            <a:off x="512064" y="2121408"/>
+            <a:ext cx="2482596" cy="329184"/>
           </a:xfrm>
           <a:prstGeom prst="rect">
             <a:avLst/>
@@ -5960,7 +6089,7 @@
           <a:p>
             <a:pPr algn="l"/>
             <a:r>
-              <a:rPr sz="1600" b="1">
+              <a:rPr sz="2000" b="1">
                 <a:solidFill>
                   <a:srgbClr val="1A1A1A"/>
                 </a:solidFill>
@@ -5980,8 +6109,8 @@
         </p:nvSpPr>
         <p:spPr>
           <a:xfrm>
-            <a:off x="512064" y="1691640"/>
-            <a:ext cx="2482596" cy="914400"/>
+            <a:off x="512064" y="2450592"/>
+            <a:ext cx="2482596" cy="1341120"/>
           </a:xfrm>
           <a:prstGeom prst="rect">
             <a:avLst/>
@@ -5996,7 +6125,7 @@
           <a:p>
             <a:pPr algn="l"/>
             <a:r>
-              <a:rPr sz="6000" b="1">
+              <a:rPr sz="8800" b="1">
                 <a:solidFill>
                   <a:srgbClr val="DB011C"/>
                 </a:solidFill>
@@ -6026,8 +6155,8 @@
         </p:nvSpPr>
         <p:spPr>
           <a:xfrm>
-            <a:off x="512064" y="2670048"/>
-            <a:ext cx="2482596" cy="274320"/>
+            <a:off x="512064" y="3855719"/>
+            <a:ext cx="2482596" cy="310896"/>
           </a:xfrm>
           <a:prstGeom prst="rect">
             <a:avLst/>
@@ -6042,9 +6171,9 @@
           <a:p>
             <a:pPr algn="l"/>
             <a:r>
-              <a:rPr sz="1400" b="0">
-                <a:solidFill>
-                  <a:srgbClr val="6B6B6B"/>
+              <a:rPr sz="1600" b="0">
+                <a:solidFill>
+                  <a:srgbClr val="333333"/>
                 </a:solidFill>
                 <a:latin typeface="Arial"/>
                 <a:ea typeface="PingFang SC"/>
@@ -6062,7 +6191,7 @@
         </p:nvCxnSpPr>
         <p:spPr>
           <a:xfrm>
-            <a:off x="512064" y="3127248"/>
+            <a:off x="512064" y="4349496"/>
             <a:ext cx="2482596" cy="0"/>
           </a:xfrm>
           <a:prstGeom prst="line">
@@ -6083,8 +6212,8 @@
         </p:nvSpPr>
         <p:spPr>
           <a:xfrm>
-            <a:off x="512064" y="3291840"/>
-            <a:ext cx="2482596" cy="1481327"/>
+            <a:off x="512064" y="4514088"/>
+            <a:ext cx="2482596" cy="1493520"/>
           </a:xfrm>
           <a:prstGeom prst="rect">
             <a:avLst/>
@@ -6097,14 +6226,14 @@
           </a:bodyPr>
           <a:lstStyle/>
           <a:p>
-            <a:pPr algn="l" marL="248919" indent="-248919">
+            <a:pPr algn="l" marL="284480" indent="-284480">
               <a:buFont typeface="Arial"/>
               <a:buChar char="•"/>
             </a:pPr>
             <a:r>
-              <a:rPr sz="1400" b="0">
-                <a:solidFill>
-                  <a:srgbClr val="1A1A1A"/>
+              <a:rPr sz="1600" b="0">
+                <a:solidFill>
+                  <a:srgbClr val="333333"/>
                 </a:solidFill>
                 <a:latin typeface="Arial"/>
                 <a:ea typeface="PingFang SC"/>
@@ -6113,7 +6242,7 @@
             </a:r>
           </a:p>
           <a:p>
-            <a:pPr algn="l" marL="248919" indent="-248919">
+            <a:pPr algn="l" marL="284480" indent="-284480">
               <a:spcBef>
                 <a:spcPts val="1000"/>
               </a:spcBef>
@@ -6121,9 +6250,9 @@
               <a:buChar char="•"/>
             </a:pPr>
             <a:r>
-              <a:rPr sz="1400" b="0">
-                <a:solidFill>
-                  <a:srgbClr val="1A1A1A"/>
+              <a:rPr sz="1600" b="0">
+                <a:solidFill>
+                  <a:srgbClr val="333333"/>
                 </a:solidFill>
                 <a:latin typeface="Arial"/>
                 <a:ea typeface="PingFang SC"/>
@@ -6141,8 +6270,8 @@
         </p:nvSpPr>
         <p:spPr>
           <a:xfrm>
-            <a:off x="3406140" y="1188720"/>
-            <a:ext cx="2482596" cy="54864"/>
+            <a:off x="3406140" y="1874520"/>
+            <a:ext cx="2482596" cy="73152"/>
           </a:xfrm>
           <a:prstGeom prst="rect">
             <a:avLst/>
@@ -6171,8 +6300,8 @@
         </p:nvSpPr>
         <p:spPr>
           <a:xfrm>
-            <a:off x="3406140" y="1417320"/>
-            <a:ext cx="2482596" cy="274320"/>
+            <a:off x="3406140" y="2121408"/>
+            <a:ext cx="2482596" cy="329184"/>
           </a:xfrm>
           <a:prstGeom prst="rect">
             <a:avLst/>
@@ -6187,7 +6316,7 @@
           <a:p>
             <a:pPr algn="l"/>
             <a:r>
-              <a:rPr sz="1600" b="1">
+              <a:rPr sz="2000" b="1">
                 <a:solidFill>
                   <a:srgbClr val="1A1A1A"/>
                 </a:solidFill>
@@ -6207,8 +6336,8 @@
         </p:nvSpPr>
         <p:spPr>
           <a:xfrm>
-            <a:off x="3406140" y="1691640"/>
-            <a:ext cx="2482596" cy="914400"/>
+            <a:off x="3406140" y="2450592"/>
+            <a:ext cx="2482596" cy="1341120"/>
           </a:xfrm>
           <a:prstGeom prst="rect">
             <a:avLst/>
@@ -6223,7 +6352,7 @@
           <a:p>
             <a:pPr algn="l"/>
             <a:r>
-              <a:rPr sz="6000" b="1">
+              <a:rPr sz="8800" b="1">
                 <a:solidFill>
                   <a:srgbClr val="1A1A1A"/>
                 </a:solidFill>
@@ -6253,8 +6382,8 @@
         </p:nvSpPr>
         <p:spPr>
           <a:xfrm>
-            <a:off x="3406140" y="2670048"/>
-            <a:ext cx="2482596" cy="274320"/>
+            <a:off x="3406140" y="3855719"/>
+            <a:ext cx="2482596" cy="310896"/>
           </a:xfrm>
           <a:prstGeom prst="rect">
             <a:avLst/>
@@ -6269,9 +6398,9 @@
           <a:p>
             <a:pPr algn="l"/>
             <a:r>
-              <a:rPr sz="1400" b="0">
-                <a:solidFill>
-                  <a:srgbClr val="6B6B6B"/>
+              <a:rPr sz="1600" b="0">
+                <a:solidFill>
+                  <a:srgbClr val="333333"/>
                 </a:solidFill>
                 <a:latin typeface="Arial"/>
                 <a:ea typeface="PingFang SC"/>
@@ -6289,7 +6418,7 @@
         </p:nvCxnSpPr>
         <p:spPr>
           <a:xfrm>
-            <a:off x="3406140" y="3127248"/>
+            <a:off x="3406140" y="4349496"/>
             <a:ext cx="2482596" cy="0"/>
           </a:xfrm>
           <a:prstGeom prst="line">
@@ -6310,8 +6439,8 @@
         </p:nvSpPr>
         <p:spPr>
           <a:xfrm>
-            <a:off x="3406140" y="3291840"/>
-            <a:ext cx="2482596" cy="1481327"/>
+            <a:off x="3406140" y="4514088"/>
+            <a:ext cx="2482596" cy="1493520"/>
           </a:xfrm>
           <a:prstGeom prst="rect">
             <a:avLst/>
@@ -6324,14 +6453,14 @@
           </a:bodyPr>
           <a:lstStyle/>
           <a:p>
-            <a:pPr algn="l" marL="248919" indent="-248919">
+            <a:pPr algn="l" marL="284480" indent="-284480">
               <a:buFont typeface="Arial"/>
               <a:buChar char="•"/>
             </a:pPr>
             <a:r>
-              <a:rPr sz="1400" b="0">
-                <a:solidFill>
-                  <a:srgbClr val="1A1A1A"/>
+              <a:rPr sz="1600" b="0">
+                <a:solidFill>
+                  <a:srgbClr val="333333"/>
                 </a:solidFill>
                 <a:latin typeface="Arial"/>
                 <a:ea typeface="PingFang SC"/>
@@ -6340,7 +6469,7 @@
             </a:r>
           </a:p>
           <a:p>
-            <a:pPr algn="l" marL="248919" indent="-248919">
+            <a:pPr algn="l" marL="284480" indent="-284480">
               <a:spcBef>
                 <a:spcPts val="1000"/>
               </a:spcBef>
@@ -6348,9 +6477,9 @@
               <a:buChar char="•"/>
             </a:pPr>
             <a:r>
-              <a:rPr sz="1400" b="0">
-                <a:solidFill>
-                  <a:srgbClr val="1A1A1A"/>
+              <a:rPr sz="1600" b="0">
+                <a:solidFill>
+                  <a:srgbClr val="333333"/>
                 </a:solidFill>
                 <a:latin typeface="Arial"/>
                 <a:ea typeface="PingFang SC"/>
@@ -6368,8 +6497,8 @@
         </p:nvSpPr>
         <p:spPr>
           <a:xfrm>
-            <a:off x="6300216" y="1188720"/>
-            <a:ext cx="2482596" cy="54864"/>
+            <a:off x="6300216" y="1874520"/>
+            <a:ext cx="2482596" cy="73152"/>
           </a:xfrm>
           <a:prstGeom prst="rect">
             <a:avLst/>
@@ -6398,8 +6527,8 @@
         </p:nvSpPr>
         <p:spPr>
           <a:xfrm>
-            <a:off x="6300216" y="1417320"/>
-            <a:ext cx="2482596" cy="274320"/>
+            <a:off x="6300216" y="2121408"/>
+            <a:ext cx="2482596" cy="329184"/>
           </a:xfrm>
           <a:prstGeom prst="rect">
             <a:avLst/>
@@ -6414,7 +6543,7 @@
           <a:p>
             <a:pPr algn="l"/>
             <a:r>
-              <a:rPr sz="1600" b="1">
+              <a:rPr sz="2000" b="1">
                 <a:solidFill>
                   <a:srgbClr val="1A1A1A"/>
                 </a:solidFill>
@@ -6434,8 +6563,8 @@
         </p:nvSpPr>
         <p:spPr>
           <a:xfrm>
-            <a:off x="6300216" y="1691640"/>
-            <a:ext cx="2482596" cy="914400"/>
+            <a:off x="6300216" y="2450592"/>
+            <a:ext cx="2482596" cy="1341120"/>
           </a:xfrm>
           <a:prstGeom prst="rect">
             <a:avLst/>
@@ -6450,7 +6579,7 @@
           <a:p>
             <a:pPr algn="l"/>
             <a:r>
-              <a:rPr sz="6000" b="1">
+              <a:rPr sz="8800" b="1">
                 <a:solidFill>
                   <a:srgbClr val="1A1A1A"/>
                 </a:solidFill>
@@ -6480,8 +6609,8 @@
         </p:nvSpPr>
         <p:spPr>
           <a:xfrm>
-            <a:off x="6300216" y="2670048"/>
-            <a:ext cx="2482596" cy="274320"/>
+            <a:off x="6300216" y="3855719"/>
+            <a:ext cx="2482596" cy="310896"/>
           </a:xfrm>
           <a:prstGeom prst="rect">
             <a:avLst/>
@@ -6496,9 +6625,9 @@
           <a:p>
             <a:pPr algn="l"/>
             <a:r>
-              <a:rPr sz="1400" b="0">
-                <a:solidFill>
-                  <a:srgbClr val="6B6B6B"/>
+              <a:rPr sz="1600" b="0">
+                <a:solidFill>
+                  <a:srgbClr val="333333"/>
                 </a:solidFill>
                 <a:latin typeface="Arial"/>
                 <a:ea typeface="PingFang SC"/>
@@ -6516,7 +6645,7 @@
         </p:nvCxnSpPr>
         <p:spPr>
           <a:xfrm>
-            <a:off x="6300216" y="3127248"/>
+            <a:off x="6300216" y="4349496"/>
             <a:ext cx="2482596" cy="0"/>
           </a:xfrm>
           <a:prstGeom prst="line">
@@ -6537,8 +6666,8 @@
         </p:nvSpPr>
         <p:spPr>
           <a:xfrm>
-            <a:off x="6300216" y="3291840"/>
-            <a:ext cx="2482596" cy="1481327"/>
+            <a:off x="6300216" y="4514088"/>
+            <a:ext cx="2482596" cy="1493520"/>
           </a:xfrm>
           <a:prstGeom prst="rect">
             <a:avLst/>
@@ -6551,14 +6680,14 @@
           </a:bodyPr>
           <a:lstStyle/>
           <a:p>
-            <a:pPr algn="l" marL="248919" indent="-248919">
+            <a:pPr algn="l" marL="284480" indent="-284480">
               <a:buFont typeface="Arial"/>
               <a:buChar char="•"/>
             </a:pPr>
             <a:r>
-              <a:rPr sz="1400" b="0">
-                <a:solidFill>
-                  <a:srgbClr val="1A1A1A"/>
+              <a:rPr sz="1600" b="0">
+                <a:solidFill>
+                  <a:srgbClr val="333333"/>
                 </a:solidFill>
                 <a:latin typeface="Arial"/>
                 <a:ea typeface="PingFang SC"/>
@@ -6576,8 +6705,8 @@
         </p:nvSpPr>
         <p:spPr>
           <a:xfrm>
-            <a:off x="9194292" y="1188720"/>
-            <a:ext cx="2482596" cy="54864"/>
+            <a:off x="9194292" y="1874520"/>
+            <a:ext cx="2482596" cy="73152"/>
           </a:xfrm>
           <a:prstGeom prst="rect">
             <a:avLst/>
@@ -6606,8 +6735,8 @@
         </p:nvSpPr>
         <p:spPr>
           <a:xfrm>
-            <a:off x="9194292" y="1417320"/>
-            <a:ext cx="2482596" cy="274320"/>
+            <a:off x="9194292" y="2121408"/>
+            <a:ext cx="2482596" cy="329184"/>
           </a:xfrm>
           <a:prstGeom prst="rect">
             <a:avLst/>
@@ -6622,7 +6751,7 @@
           <a:p>
             <a:pPr algn="l"/>
             <a:r>
-              <a:rPr sz="1600" b="1">
+              <a:rPr sz="2000" b="1">
                 <a:solidFill>
                   <a:srgbClr val="1A1A1A"/>
                 </a:solidFill>
@@ -6642,8 +6771,8 @@
         </p:nvSpPr>
         <p:spPr>
           <a:xfrm>
-            <a:off x="9194292" y="1691640"/>
-            <a:ext cx="2482596" cy="914400"/>
+            <a:off x="9194292" y="2450592"/>
+            <a:ext cx="2482596" cy="1341120"/>
           </a:xfrm>
           <a:prstGeom prst="rect">
             <a:avLst/>
@@ -6658,7 +6787,7 @@
           <a:p>
             <a:pPr algn="l"/>
             <a:r>
-              <a:rPr sz="6000" b="1">
+              <a:rPr sz="8800" b="1">
                 <a:solidFill>
                   <a:srgbClr val="1A1A1A"/>
                 </a:solidFill>
@@ -6688,8 +6817,8 @@
         </p:nvSpPr>
         <p:spPr>
           <a:xfrm>
-            <a:off x="9194292" y="2670048"/>
-            <a:ext cx="2482596" cy="274320"/>
+            <a:off x="9194292" y="3855719"/>
+            <a:ext cx="2482596" cy="310896"/>
           </a:xfrm>
           <a:prstGeom prst="rect">
             <a:avLst/>
@@ -6704,9 +6833,9 @@
           <a:p>
             <a:pPr algn="l"/>
             <a:r>
-              <a:rPr sz="1400" b="0">
-                <a:solidFill>
-                  <a:srgbClr val="6B6B6B"/>
+              <a:rPr sz="1600" b="0">
+                <a:solidFill>
+                  <a:srgbClr val="333333"/>
                 </a:solidFill>
                 <a:latin typeface="Arial"/>
                 <a:ea typeface="PingFang SC"/>
@@ -6724,7 +6853,7 @@
         </p:nvCxnSpPr>
         <p:spPr>
           <a:xfrm>
-            <a:off x="9194292" y="3127248"/>
+            <a:off x="9194292" y="4349496"/>
             <a:ext cx="2482596" cy="0"/>
           </a:xfrm>
           <a:prstGeom prst="line">
@@ -6745,8 +6874,8 @@
         </p:nvSpPr>
         <p:spPr>
           <a:xfrm>
-            <a:off x="9194292" y="3291840"/>
-            <a:ext cx="2482596" cy="1481327"/>
+            <a:off x="9194292" y="4514088"/>
+            <a:ext cx="2482596" cy="1493520"/>
           </a:xfrm>
           <a:prstGeom prst="rect">
             <a:avLst/>
@@ -6759,14 +6888,14 @@
           </a:bodyPr>
           <a:lstStyle/>
           <a:p>
-            <a:pPr algn="l" marL="248919" indent="-248919">
+            <a:pPr algn="l" marL="284480" indent="-284480">
               <a:buFont typeface="Arial"/>
               <a:buChar char="•"/>
             </a:pPr>
             <a:r>
-              <a:rPr sz="1400" b="0">
-                <a:solidFill>
-                  <a:srgbClr val="1A1A1A"/>
+              <a:rPr sz="1600" b="0">
+                <a:solidFill>
+                  <a:srgbClr val="333333"/>
                 </a:solidFill>
                 <a:latin typeface="Arial"/>
                 <a:ea typeface="PingFang SC"/>
@@ -6784,7 +6913,7 @@
         </p:nvSpPr>
         <p:spPr>
           <a:xfrm>
-            <a:off x="512064" y="4864608"/>
+            <a:off x="512064" y="6099048"/>
             <a:ext cx="11164824" cy="256032"/>
           </a:xfrm>
           <a:prstGeom prst="rect">
@@ -6807,23 +6936,21 @@
                 <a:latin typeface="Arial"/>
                 <a:ea typeface="PingFang SC"/>
               </a:rPr>
-              <a:t>口径：2026 年 6 月对比 9 月，A 仓 12 台；可用率为设备系统导出、不含计划保养</a:t>
-            </a:r>
-          </a:p>
-        </p:txBody>
-      </p:sp>
-      <p:sp>
-        <p:nvSpPr>
-          <p:cNvPr id="29" name="Caption Bar"/>
-          <p:cNvSpPr txBox="1">
-            <a:spLocks noChangeArrowheads="1"/>
-          </p:cNvSpPr>
-          <p:nvPr/>
-        </p:nvSpPr>
-        <p:spPr bwMode="auto">
-          <a:xfrm>
-            <a:off x="155575" y="5379048"/>
-            <a:ext cx="11874874" cy="1097952"/>
+              <a:t>口径：2026 年 6 月对比 9 月，A 仓 12 台；可用率为设备系统导出、不含计划保养；6 月、9 月作业量相近</a:t>
+            </a:r>
+          </a:p>
+        </p:txBody>
+      </p:sp>
+      <p:sp>
+        <p:nvSpPr>
+          <p:cNvPr id="29" name="Lead Accent"/>
+          <p:cNvSpPr/>
+          <p:nvPr/>
+        </p:nvSpPr>
+        <p:spPr>
+          <a:xfrm>
+            <a:off x="512064" y="1243584"/>
+            <a:ext cx="73152" cy="402336"/>
           </a:xfrm>
           <a:prstGeom prst="rect">
             <a:avLst/>
@@ -6831,46 +6958,50 @@
           <a:solidFill>
             <a:srgbClr val="DB011C"/>
           </a:solidFill>
-          <a:ln w="9525" cap="flat" cmpd="sng" algn="ctr">
-            <a:solidFill>
-              <a:schemeClr val="tx1"/>
-            </a:solidFill>
-            <a:prstDash val="solid"/>
-            <a:round/>
-            <a:headEnd type="none" w="med" len="med"/>
-            <a:tailEnd type="none" w="med" len="med"/>
+          <a:ln>
+            <a:noFill/>
           </a:ln>
           <a:effectLst/>
         </p:spPr>
         <p:txBody>
-          <a:bodyPr vert="horz" wrap="square" lIns="91440" tIns="45720" rIns="91440" bIns="45720" numCol="1" rtlCol="0" anchor="ctr" anchorCtr="0" compatLnSpc="1">
-            <a:prstTxWarp prst="textNoShape">
-              <a:avLst/>
-            </a:prstTxWarp>
+          <a:bodyPr rtlCol="0" anchor="ctr"/>
+          <a:lstStyle/>
+          <a:p>
+            <a:pPr algn="ctr"/>
+          </a:p>
+        </p:txBody>
+      </p:sp>
+      <p:sp>
+        <p:nvSpPr>
+          <p:cNvPr id="30" name="Lead"/>
+          <p:cNvSpPr txBox="1"/>
+          <p:nvPr/>
+        </p:nvSpPr>
+        <p:spPr>
+          <a:xfrm>
+            <a:off x="731520" y="1188720"/>
+            <a:ext cx="10936224" cy="512064"/>
+          </a:xfrm>
+          <a:prstGeom prst="rect">
+            <a:avLst/>
+          </a:prstGeom>
+          <a:noFill/>
+        </p:spPr>
+        <p:txBody>
+          <a:bodyPr wrap="square" lIns="0" rIns="0" tIns="0" bIns="0" anchor="ctr">
+            <a:spAutoFit/>
           </a:bodyPr>
-          <a:lstStyle>
-            <a:defPPr>
-              <a:defRPr lang="en-US"/>
-            </a:defPPr>
-            <a:lvl1pPr marL="342900" indent="-342900" eaLnBrk="0" hangingPunct="0">
-              <a:lnSpc>
-                <a:spcPct val="150000"/>
-              </a:lnSpc>
-              <a:buFont typeface="Wingdings" panose="05000000000000000000" pitchFamily="2" charset="2"/>
-              <a:buChar char="v"/>
-              <a:defRPr sz="1400" b="0">
-                <a:solidFill>
-                  <a:schemeClr val="bg1"/>
-                </a:solidFill>
-                <a:ea typeface="微软雅黑" panose="020B0503020204020204" pitchFamily="34" charset="-122"/>
-                <a:cs typeface="Arial" panose="020B0604020202020204" pitchFamily="34" charset="0"/>
-              </a:defRPr>
-            </a:lvl1pPr>
-          </a:lstStyle>
-          <a:p>
-            <a:r>
-              <a:rPr lang="en-US" altLang="zh-CN" dirty="0"/>
-              <a:t>6 月、9 月作业量相近，前后可比</a:t>
+          <a:lstStyle/>
+          <a:p>
+            <a:r>
+              <a:rPr sz="2200" b="1">
+                <a:solidFill>
+                  <a:srgbClr val="1A1A1A"/>
+                </a:solidFill>
+                <a:latin typeface="Arial"/>
+                <a:ea typeface="PingFang SC"/>
+              </a:rPr>
+              <a:t>改善来自排班，不是业务变少：两月作业量相近，等待少 27 分钟</a:t>
             </a:r>
           </a:p>
         </p:txBody>
@@ -6937,33 +7068,41 @@
       </p:sp>
       <p:sp>
         <p:nvSpPr>
-          <p:cNvPr id="4" name="Member Card 1"/>
+          <p:cNvPr id="4" name="Member Avatar 1"/>
           <p:cNvSpPr/>
           <p:nvPr/>
         </p:nvSpPr>
         <p:spPr>
           <a:xfrm>
-            <a:off x="512064" y="2288159"/>
-            <a:ext cx="2583179" cy="1733042"/>
-          </a:xfrm>
-          <a:prstGeom prst="rect">
+            <a:off x="1266444" y="2767457"/>
+            <a:ext cx="1280160" cy="1280160"/>
+          </a:xfrm>
+          <a:prstGeom prst="ellipse">
             <a:avLst/>
           </a:prstGeom>
           <a:solidFill>
-            <a:srgbClr val="F5F5F5"/>
+            <a:srgbClr val="1A1A1A"/>
           </a:solidFill>
-          <a:ln w="9525">
-            <a:solidFill>
-              <a:srgbClr val="E5E5E5"/>
-            </a:solidFill>
+          <a:ln>
+            <a:noFill/>
           </a:ln>
           <a:effectLst/>
         </p:spPr>
         <p:txBody>
-          <a:bodyPr rtlCol="0" anchor="ctr"/>
+          <a:bodyPr rtlCol="0" anchor="ctr" wrap="none" lIns="0" rIns="0" tIns="0" bIns="0"/>
           <a:lstStyle/>
           <a:p>
             <a:pPr algn="ctr"/>
+            <a:r>
+              <a:rPr sz="4400" b="1">
+                <a:solidFill>
+                  <a:srgbClr val="FFFFFF"/>
+                </a:solidFill>
+                <a:latin typeface="Arial"/>
+                <a:ea typeface="PingFang SC"/>
+              </a:rPr>
+              <a:t>林</a:t>
+            </a:r>
           </a:p>
         </p:txBody>
       </p:sp>
@@ -6975,43 +7114,8 @@
         </p:nvSpPr>
         <p:spPr>
           <a:xfrm>
-            <a:off x="694944" y="2471039"/>
-            <a:ext cx="2217420" cy="317500"/>
-          </a:xfrm>
-          <a:prstGeom prst="rect">
-            <a:avLst/>
-          </a:prstGeom>
-          <a:noFill/>
-        </p:spPr>
-        <p:txBody>
-          <a:bodyPr wrap="none" lIns="0" rIns="0" tIns="0" bIns="0" anchor="b">
-            <a:spAutoFit/>
-          </a:bodyPr>
-          <a:lstStyle/>
-          <a:p>
-            <a:r>
-              <a:rPr sz="2000" b="1">
-                <a:solidFill>
-                  <a:srgbClr val="1A1A1A"/>
-                </a:solidFill>
-                <a:latin typeface="Arial"/>
-                <a:ea typeface="PingFang SC"/>
-              </a:rPr>
-              <a:t>林晓</a:t>
-            </a:r>
-          </a:p>
-        </p:txBody>
-      </p:sp>
-      <p:sp>
-        <p:nvSpPr>
-          <p:cNvPr id="6" name="Member Role 1"/>
-          <p:cNvSpPr txBox="1"/>
-          <p:nvPr/>
-        </p:nvSpPr>
-        <p:spPr>
-          <a:xfrm>
-            <a:off x="694944" y="2825115"/>
-            <a:ext cx="2217420" cy="222250"/>
+            <a:off x="694944" y="4276217"/>
+            <a:ext cx="2423160" cy="381000"/>
           </a:xfrm>
           <a:prstGeom prst="rect">
             <a:avLst/>
@@ -7024,8 +7128,45 @@
           </a:bodyPr>
           <a:lstStyle/>
           <a:p>
-            <a:r>
-              <a:rPr sz="1400" b="0">
+            <a:pPr algn="ctr"/>
+            <a:r>
+              <a:rPr sz="2400" b="1">
+                <a:solidFill>
+                  <a:srgbClr val="1A1A1A"/>
+                </a:solidFill>
+                <a:latin typeface="Arial"/>
+                <a:ea typeface="PingFang SC"/>
+              </a:rPr>
+              <a:t>林晓</a:t>
+            </a:r>
+          </a:p>
+        </p:txBody>
+      </p:sp>
+      <p:sp>
+        <p:nvSpPr>
+          <p:cNvPr id="6" name="Member Role 1"/>
+          <p:cNvSpPr txBox="1"/>
+          <p:nvPr/>
+        </p:nvSpPr>
+        <p:spPr>
+          <a:xfrm>
+            <a:off x="694944" y="4693793"/>
+            <a:ext cx="2423160" cy="254000"/>
+          </a:xfrm>
+          <a:prstGeom prst="rect">
+            <a:avLst/>
+          </a:prstGeom>
+          <a:noFill/>
+        </p:spPr>
+        <p:txBody>
+          <a:bodyPr wrap="none" lIns="0" rIns="0" tIns="0" bIns="0" anchor="t">
+            <a:spAutoFit/>
+          </a:bodyPr>
+          <a:lstStyle/>
+          <a:p>
+            <a:pPr algn="ctr"/>
+            <a:r>
+              <a:rPr sz="1600" b="0">
                 <a:solidFill>
                   <a:srgbClr val="6B6B6B"/>
                 </a:solidFill>
@@ -7045,8 +7186,8 @@
         </p:nvCxnSpPr>
         <p:spPr>
           <a:xfrm>
-            <a:off x="694944" y="3157093"/>
-            <a:ext cx="2217420" cy="0"/>
+            <a:off x="1586484" y="5062093"/>
+            <a:ext cx="640080" cy="0"/>
           </a:xfrm>
           <a:prstGeom prst="line">
             <a:avLst/>
@@ -7066,8 +7207,8 @@
         </p:nvSpPr>
         <p:spPr>
           <a:xfrm>
-            <a:off x="694944" y="3266821"/>
-            <a:ext cx="2217420" cy="571500"/>
+            <a:off x="694944" y="5176393"/>
+            <a:ext cx="2423160" cy="285750"/>
           </a:xfrm>
           <a:prstGeom prst="rect">
             <a:avLst/>
@@ -7080,10 +7221,11 @@
           </a:bodyPr>
           <a:lstStyle/>
           <a:p>
-            <a:r>
-              <a:rPr sz="1200" b="0">
-                <a:solidFill>
-                  <a:srgbClr val="1A1A1A"/>
+            <a:pPr algn="ctr"/>
+            <a:r>
+              <a:rPr sz="1800" b="0">
+                <a:solidFill>
+                  <a:srgbClr val="333333"/>
                 </a:solidFill>
                 <a:latin typeface="Arial"/>
                 <a:ea typeface="PingFang SC"/>
@@ -7095,33 +7237,41 @@
       </p:sp>
       <p:sp>
         <p:nvSpPr>
-          <p:cNvPr id="9" name="Member Card 2"/>
+          <p:cNvPr id="9" name="Member Avatar 2"/>
           <p:cNvSpPr/>
           <p:nvPr/>
         </p:nvSpPr>
         <p:spPr>
           <a:xfrm>
-            <a:off x="3369563" y="2288159"/>
-            <a:ext cx="2583179" cy="1733042"/>
-          </a:xfrm>
-          <a:prstGeom prst="rect">
+            <a:off x="4055363" y="2767457"/>
+            <a:ext cx="1280160" cy="1280160"/>
+          </a:xfrm>
+          <a:prstGeom prst="ellipse">
             <a:avLst/>
           </a:prstGeom>
           <a:solidFill>
-            <a:srgbClr val="F5F5F5"/>
+            <a:srgbClr val="1A1A1A"/>
           </a:solidFill>
-          <a:ln w="9525">
-            <a:solidFill>
-              <a:srgbClr val="E5E5E5"/>
-            </a:solidFill>
+          <a:ln>
+            <a:noFill/>
           </a:ln>
           <a:effectLst/>
         </p:spPr>
         <p:txBody>
-          <a:bodyPr rtlCol="0" anchor="ctr"/>
+          <a:bodyPr rtlCol="0" anchor="ctr" wrap="none" lIns="0" rIns="0" tIns="0" bIns="0"/>
           <a:lstStyle/>
           <a:p>
             <a:pPr algn="ctr"/>
+            <a:r>
+              <a:rPr sz="4400" b="1">
+                <a:solidFill>
+                  <a:srgbClr val="FFFFFF"/>
+                </a:solidFill>
+                <a:latin typeface="Arial"/>
+                <a:ea typeface="PingFang SC"/>
+              </a:rPr>
+              <a:t>周</a:t>
+            </a:r>
           </a:p>
         </p:txBody>
       </p:sp>
@@ -7133,43 +7283,8 @@
         </p:nvSpPr>
         <p:spPr>
           <a:xfrm>
-            <a:off x="3552444" y="2471039"/>
-            <a:ext cx="2217420" cy="317500"/>
-          </a:xfrm>
-          <a:prstGeom prst="rect">
-            <a:avLst/>
-          </a:prstGeom>
-          <a:noFill/>
-        </p:spPr>
-        <p:txBody>
-          <a:bodyPr wrap="none" lIns="0" rIns="0" tIns="0" bIns="0" anchor="b">
-            <a:spAutoFit/>
-          </a:bodyPr>
-          <a:lstStyle/>
-          <a:p>
-            <a:r>
-              <a:rPr sz="2000" b="1">
-                <a:solidFill>
-                  <a:srgbClr val="1A1A1A"/>
-                </a:solidFill>
-                <a:latin typeface="Arial"/>
-                <a:ea typeface="PingFang SC"/>
-              </a:rPr>
-              <a:t>周峻</a:t>
-            </a:r>
-          </a:p>
-        </p:txBody>
-      </p:sp>
-      <p:sp>
-        <p:nvSpPr>
-          <p:cNvPr id="11" name="Member Role 2"/>
-          <p:cNvSpPr txBox="1"/>
-          <p:nvPr/>
-        </p:nvSpPr>
-        <p:spPr>
-          <a:xfrm>
-            <a:off x="3552444" y="2825115"/>
-            <a:ext cx="2217420" cy="222250"/>
+            <a:off x="3483863" y="4276217"/>
+            <a:ext cx="2423160" cy="381000"/>
           </a:xfrm>
           <a:prstGeom prst="rect">
             <a:avLst/>
@@ -7182,8 +7297,45 @@
           </a:bodyPr>
           <a:lstStyle/>
           <a:p>
-            <a:r>
-              <a:rPr sz="1400" b="0">
+            <a:pPr algn="ctr"/>
+            <a:r>
+              <a:rPr sz="2400" b="1">
+                <a:solidFill>
+                  <a:srgbClr val="1A1A1A"/>
+                </a:solidFill>
+                <a:latin typeface="Arial"/>
+                <a:ea typeface="PingFang SC"/>
+              </a:rPr>
+              <a:t>周峻</a:t>
+            </a:r>
+          </a:p>
+        </p:txBody>
+      </p:sp>
+      <p:sp>
+        <p:nvSpPr>
+          <p:cNvPr id="11" name="Member Role 2"/>
+          <p:cNvSpPr txBox="1"/>
+          <p:nvPr/>
+        </p:nvSpPr>
+        <p:spPr>
+          <a:xfrm>
+            <a:off x="3483863" y="4693793"/>
+            <a:ext cx="2423160" cy="254000"/>
+          </a:xfrm>
+          <a:prstGeom prst="rect">
+            <a:avLst/>
+          </a:prstGeom>
+          <a:noFill/>
+        </p:spPr>
+        <p:txBody>
+          <a:bodyPr wrap="none" lIns="0" rIns="0" tIns="0" bIns="0" anchor="t">
+            <a:spAutoFit/>
+          </a:bodyPr>
+          <a:lstStyle/>
+          <a:p>
+            <a:pPr algn="ctr"/>
+            <a:r>
+              <a:rPr sz="1600" b="0">
                 <a:solidFill>
                   <a:srgbClr val="6B6B6B"/>
                 </a:solidFill>
@@ -7203,8 +7355,8 @@
         </p:nvCxnSpPr>
         <p:spPr>
           <a:xfrm>
-            <a:off x="3552444" y="3157093"/>
-            <a:ext cx="2217420" cy="0"/>
+            <a:off x="4375404" y="5062093"/>
+            <a:ext cx="640079" cy="0"/>
           </a:xfrm>
           <a:prstGeom prst="line">
             <a:avLst/>
@@ -7224,8 +7376,8 @@
         </p:nvSpPr>
         <p:spPr>
           <a:xfrm>
-            <a:off x="3552444" y="3266821"/>
-            <a:ext cx="2217420" cy="571500"/>
+            <a:off x="3483863" y="5176393"/>
+            <a:ext cx="2423160" cy="285750"/>
           </a:xfrm>
           <a:prstGeom prst="rect">
             <a:avLst/>
@@ -7238,10 +7390,11 @@
           </a:bodyPr>
           <a:lstStyle/>
           <a:p>
-            <a:r>
-              <a:rPr sz="1200" b="0">
-                <a:solidFill>
-                  <a:srgbClr val="1A1A1A"/>
+            <a:pPr algn="ctr"/>
+            <a:r>
+              <a:rPr sz="1800" b="0">
+                <a:solidFill>
+                  <a:srgbClr val="333333"/>
                 </a:solidFill>
                 <a:latin typeface="Arial"/>
                 <a:ea typeface="PingFang SC"/>
@@ -7253,33 +7406,41 @@
       </p:sp>
       <p:sp>
         <p:nvSpPr>
-          <p:cNvPr id="14" name="Member Card 3"/>
+          <p:cNvPr id="14" name="Member Avatar 3"/>
           <p:cNvSpPr/>
           <p:nvPr/>
         </p:nvSpPr>
         <p:spPr>
           <a:xfrm>
-            <a:off x="6227063" y="2288159"/>
-            <a:ext cx="2583179" cy="1733042"/>
-          </a:xfrm>
-          <a:prstGeom prst="rect">
+            <a:off x="6844284" y="2767457"/>
+            <a:ext cx="1280160" cy="1280160"/>
+          </a:xfrm>
+          <a:prstGeom prst="ellipse">
             <a:avLst/>
           </a:prstGeom>
           <a:solidFill>
-            <a:srgbClr val="F5F5F5"/>
+            <a:srgbClr val="1A1A1A"/>
           </a:solidFill>
-          <a:ln w="9525">
-            <a:solidFill>
-              <a:srgbClr val="E5E5E5"/>
-            </a:solidFill>
+          <a:ln>
+            <a:noFill/>
           </a:ln>
           <a:effectLst/>
         </p:spPr>
         <p:txBody>
-          <a:bodyPr rtlCol="0" anchor="ctr"/>
+          <a:bodyPr rtlCol="0" anchor="ctr" wrap="none" lIns="0" rIns="0" tIns="0" bIns="0"/>
           <a:lstStyle/>
           <a:p>
             <a:pPr algn="ctr"/>
+            <a:r>
+              <a:rPr sz="4400" b="1">
+                <a:solidFill>
+                  <a:srgbClr val="FFFFFF"/>
+                </a:solidFill>
+                <a:latin typeface="Arial"/>
+                <a:ea typeface="PingFang SC"/>
+              </a:rPr>
+              <a:t>陈</a:t>
+            </a:r>
           </a:p>
         </p:txBody>
       </p:sp>
@@ -7291,43 +7452,8 @@
         </p:nvSpPr>
         <p:spPr>
           <a:xfrm>
-            <a:off x="6409943" y="2471039"/>
-            <a:ext cx="2217420" cy="317500"/>
-          </a:xfrm>
-          <a:prstGeom prst="rect">
-            <a:avLst/>
-          </a:prstGeom>
-          <a:noFill/>
-        </p:spPr>
-        <p:txBody>
-          <a:bodyPr wrap="none" lIns="0" rIns="0" tIns="0" bIns="0" anchor="b">
-            <a:spAutoFit/>
-          </a:bodyPr>
-          <a:lstStyle/>
-          <a:p>
-            <a:r>
-              <a:rPr sz="2000" b="1">
-                <a:solidFill>
-                  <a:srgbClr val="1A1A1A"/>
-                </a:solidFill>
-                <a:latin typeface="Arial"/>
-                <a:ea typeface="PingFang SC"/>
-              </a:rPr>
-              <a:t>陈蓉</a:t>
-            </a:r>
-          </a:p>
-        </p:txBody>
-      </p:sp>
-      <p:sp>
-        <p:nvSpPr>
-          <p:cNvPr id="16" name="Member Role 3"/>
-          <p:cNvSpPr txBox="1"/>
-          <p:nvPr/>
-        </p:nvSpPr>
-        <p:spPr>
-          <a:xfrm>
-            <a:off x="6409943" y="2825115"/>
-            <a:ext cx="2217420" cy="222250"/>
+            <a:off x="6272784" y="4276217"/>
+            <a:ext cx="2423160" cy="381000"/>
           </a:xfrm>
           <a:prstGeom prst="rect">
             <a:avLst/>
@@ -7340,8 +7466,45 @@
           </a:bodyPr>
           <a:lstStyle/>
           <a:p>
-            <a:r>
-              <a:rPr sz="1400" b="0">
+            <a:pPr algn="ctr"/>
+            <a:r>
+              <a:rPr sz="2400" b="1">
+                <a:solidFill>
+                  <a:srgbClr val="1A1A1A"/>
+                </a:solidFill>
+                <a:latin typeface="Arial"/>
+                <a:ea typeface="PingFang SC"/>
+              </a:rPr>
+              <a:t>陈蓉</a:t>
+            </a:r>
+          </a:p>
+        </p:txBody>
+      </p:sp>
+      <p:sp>
+        <p:nvSpPr>
+          <p:cNvPr id="16" name="Member Role 3"/>
+          <p:cNvSpPr txBox="1"/>
+          <p:nvPr/>
+        </p:nvSpPr>
+        <p:spPr>
+          <a:xfrm>
+            <a:off x="6272784" y="4693793"/>
+            <a:ext cx="2423160" cy="254000"/>
+          </a:xfrm>
+          <a:prstGeom prst="rect">
+            <a:avLst/>
+          </a:prstGeom>
+          <a:noFill/>
+        </p:spPr>
+        <p:txBody>
+          <a:bodyPr wrap="none" lIns="0" rIns="0" tIns="0" bIns="0" anchor="t">
+            <a:spAutoFit/>
+          </a:bodyPr>
+          <a:lstStyle/>
+          <a:p>
+            <a:pPr algn="ctr"/>
+            <a:r>
+              <a:rPr sz="1600" b="0">
                 <a:solidFill>
                   <a:srgbClr val="6B6B6B"/>
                 </a:solidFill>
@@ -7361,8 +7524,8 @@
         </p:nvCxnSpPr>
         <p:spPr>
           <a:xfrm>
-            <a:off x="6409943" y="3157093"/>
-            <a:ext cx="2217420" cy="0"/>
+            <a:off x="7164324" y="5062093"/>
+            <a:ext cx="640080" cy="0"/>
           </a:xfrm>
           <a:prstGeom prst="line">
             <a:avLst/>
@@ -7382,8 +7545,8 @@
         </p:nvSpPr>
         <p:spPr>
           <a:xfrm>
-            <a:off x="6409943" y="3266821"/>
-            <a:ext cx="2217420" cy="571500"/>
+            <a:off x="6272784" y="5176393"/>
+            <a:ext cx="2423160" cy="285750"/>
           </a:xfrm>
           <a:prstGeom prst="rect">
             <a:avLst/>
@@ -7396,10 +7559,11 @@
           </a:bodyPr>
           <a:lstStyle/>
           <a:p>
-            <a:r>
-              <a:rPr sz="1200" b="0">
-                <a:solidFill>
-                  <a:srgbClr val="1A1A1A"/>
+            <a:pPr algn="ctr"/>
+            <a:r>
+              <a:rPr sz="1800" b="0">
+                <a:solidFill>
+                  <a:srgbClr val="333333"/>
                 </a:solidFill>
                 <a:latin typeface="Arial"/>
                 <a:ea typeface="PingFang SC"/>
@@ -7411,33 +7575,41 @@
       </p:sp>
       <p:sp>
         <p:nvSpPr>
-          <p:cNvPr id="19" name="Member Card 4"/>
+          <p:cNvPr id="19" name="Member Avatar 4"/>
           <p:cNvSpPr/>
           <p:nvPr/>
         </p:nvSpPr>
         <p:spPr>
           <a:xfrm>
-            <a:off x="9084563" y="2288159"/>
-            <a:ext cx="2583179" cy="1733042"/>
-          </a:xfrm>
-          <a:prstGeom prst="rect">
+            <a:off x="9633204" y="2767457"/>
+            <a:ext cx="1280160" cy="1280160"/>
+          </a:xfrm>
+          <a:prstGeom prst="ellipse">
             <a:avLst/>
           </a:prstGeom>
           <a:solidFill>
-            <a:srgbClr val="F5F5F5"/>
+            <a:srgbClr val="1A1A1A"/>
           </a:solidFill>
-          <a:ln w="9525">
-            <a:solidFill>
-              <a:srgbClr val="E5E5E5"/>
-            </a:solidFill>
+          <a:ln>
+            <a:noFill/>
           </a:ln>
           <a:effectLst/>
         </p:spPr>
         <p:txBody>
-          <a:bodyPr rtlCol="0" anchor="ctr"/>
+          <a:bodyPr rtlCol="0" anchor="ctr" wrap="none" lIns="0" rIns="0" tIns="0" bIns="0"/>
           <a:lstStyle/>
           <a:p>
             <a:pPr algn="ctr"/>
+            <a:r>
+              <a:rPr sz="4400" b="1">
+                <a:solidFill>
+                  <a:srgbClr val="FFFFFF"/>
+                </a:solidFill>
+                <a:latin typeface="Arial"/>
+                <a:ea typeface="PingFang SC"/>
+              </a:rPr>
+              <a:t>吴</a:t>
+            </a:r>
           </a:p>
         </p:txBody>
       </p:sp>
@@ -7449,43 +7621,8 @@
         </p:nvSpPr>
         <p:spPr>
           <a:xfrm>
-            <a:off x="9267443" y="2471039"/>
-            <a:ext cx="2217420" cy="317500"/>
-          </a:xfrm>
-          <a:prstGeom prst="rect">
-            <a:avLst/>
-          </a:prstGeom>
-          <a:noFill/>
-        </p:spPr>
-        <p:txBody>
-          <a:bodyPr wrap="none" lIns="0" rIns="0" tIns="0" bIns="0" anchor="b">
-            <a:spAutoFit/>
-          </a:bodyPr>
-          <a:lstStyle/>
-          <a:p>
-            <a:r>
-              <a:rPr sz="2000" b="1">
-                <a:solidFill>
-                  <a:srgbClr val="1A1A1A"/>
-                </a:solidFill>
-                <a:latin typeface="Arial"/>
-                <a:ea typeface="PingFang SC"/>
-              </a:rPr>
-              <a:t>吴迪</a:t>
-            </a:r>
-          </a:p>
-        </p:txBody>
-      </p:sp>
-      <p:sp>
-        <p:nvSpPr>
-          <p:cNvPr id="21" name="Member Role 4"/>
-          <p:cNvSpPr txBox="1"/>
-          <p:nvPr/>
-        </p:nvSpPr>
-        <p:spPr>
-          <a:xfrm>
-            <a:off x="9267443" y="2825115"/>
-            <a:ext cx="2217420" cy="222250"/>
+            <a:off x="9061704" y="4276217"/>
+            <a:ext cx="2423160" cy="381000"/>
           </a:xfrm>
           <a:prstGeom prst="rect">
             <a:avLst/>
@@ -7498,8 +7635,45 @@
           </a:bodyPr>
           <a:lstStyle/>
           <a:p>
-            <a:r>
-              <a:rPr sz="1400" b="0">
+            <a:pPr algn="ctr"/>
+            <a:r>
+              <a:rPr sz="2400" b="1">
+                <a:solidFill>
+                  <a:srgbClr val="1A1A1A"/>
+                </a:solidFill>
+                <a:latin typeface="Arial"/>
+                <a:ea typeface="PingFang SC"/>
+              </a:rPr>
+              <a:t>吴迪</a:t>
+            </a:r>
+          </a:p>
+        </p:txBody>
+      </p:sp>
+      <p:sp>
+        <p:nvSpPr>
+          <p:cNvPr id="21" name="Member Role 4"/>
+          <p:cNvSpPr txBox="1"/>
+          <p:nvPr/>
+        </p:nvSpPr>
+        <p:spPr>
+          <a:xfrm>
+            <a:off x="9061704" y="4693793"/>
+            <a:ext cx="2423160" cy="254000"/>
+          </a:xfrm>
+          <a:prstGeom prst="rect">
+            <a:avLst/>
+          </a:prstGeom>
+          <a:noFill/>
+        </p:spPr>
+        <p:txBody>
+          <a:bodyPr wrap="none" lIns="0" rIns="0" tIns="0" bIns="0" anchor="t">
+            <a:spAutoFit/>
+          </a:bodyPr>
+          <a:lstStyle/>
+          <a:p>
+            <a:pPr algn="ctr"/>
+            <a:r>
+              <a:rPr sz="1600" b="0">
                 <a:solidFill>
                   <a:srgbClr val="6B6B6B"/>
                 </a:solidFill>
@@ -7519,8 +7693,8 @@
         </p:nvCxnSpPr>
         <p:spPr>
           <a:xfrm>
-            <a:off x="9267443" y="3157093"/>
-            <a:ext cx="2217420" cy="0"/>
+            <a:off x="9953244" y="5062093"/>
+            <a:ext cx="640080" cy="0"/>
           </a:xfrm>
           <a:prstGeom prst="line">
             <a:avLst/>
@@ -7540,8 +7714,8 @@
         </p:nvSpPr>
         <p:spPr>
           <a:xfrm>
-            <a:off x="9267443" y="3266821"/>
-            <a:ext cx="2217420" cy="571500"/>
+            <a:off x="9061704" y="5176393"/>
+            <a:ext cx="2423160" cy="285750"/>
           </a:xfrm>
           <a:prstGeom prst="rect">
             <a:avLst/>
@@ -7554,10 +7728,11 @@
           </a:bodyPr>
           <a:lstStyle/>
           <a:p>
-            <a:r>
-              <a:rPr sz="1200" b="0">
-                <a:solidFill>
-                  <a:srgbClr val="1A1A1A"/>
+            <a:pPr algn="ctr"/>
+            <a:r>
+              <a:rPr sz="1800" b="0">
+                <a:solidFill>
+                  <a:srgbClr val="333333"/>
                 </a:solidFill>
                 <a:latin typeface="Arial"/>
                 <a:ea typeface="PingFang SC"/>
@@ -7569,16 +7744,14 @@
       </p:sp>
       <p:sp>
         <p:nvSpPr>
-          <p:cNvPr id="24" name="Caption Bar"/>
-          <p:cNvSpPr txBox="1">
-            <a:spLocks noChangeArrowheads="1"/>
-          </p:cNvSpPr>
-          <p:nvPr/>
-        </p:nvSpPr>
-        <p:spPr bwMode="auto">
-          <a:xfrm>
-            <a:off x="155575" y="5379048"/>
-            <a:ext cx="11874874" cy="1097952"/>
+          <p:cNvPr id="24" name="Lead Accent"/>
+          <p:cNvSpPr/>
+          <p:nvPr/>
+        </p:nvSpPr>
+        <p:spPr>
+          <a:xfrm>
+            <a:off x="512064" y="1243584"/>
+            <a:ext cx="73152" cy="402336"/>
           </a:xfrm>
           <a:prstGeom prst="rect">
             <a:avLst/>
@@ -7586,45 +7759,49 @@
           <a:solidFill>
             <a:srgbClr val="DB011C"/>
           </a:solidFill>
-          <a:ln w="9525" cap="flat" cmpd="sng" algn="ctr">
-            <a:solidFill>
-              <a:schemeClr val="tx1"/>
-            </a:solidFill>
-            <a:prstDash val="solid"/>
-            <a:round/>
-            <a:headEnd type="none" w="med" len="med"/>
-            <a:tailEnd type="none" w="med" len="med"/>
+          <a:ln>
+            <a:noFill/>
           </a:ln>
           <a:effectLst/>
         </p:spPr>
         <p:txBody>
-          <a:bodyPr vert="horz" wrap="square" lIns="91440" tIns="45720" rIns="91440" bIns="45720" numCol="1" rtlCol="0" anchor="ctr" anchorCtr="0" compatLnSpc="1">
-            <a:prstTxWarp prst="textNoShape">
-              <a:avLst/>
-            </a:prstTxWarp>
+          <a:bodyPr rtlCol="0" anchor="ctr"/>
+          <a:lstStyle/>
+          <a:p>
+            <a:pPr algn="ctr"/>
+          </a:p>
+        </p:txBody>
+      </p:sp>
+      <p:sp>
+        <p:nvSpPr>
+          <p:cNvPr id="25" name="Lead"/>
+          <p:cNvSpPr txBox="1"/>
+          <p:nvPr/>
+        </p:nvSpPr>
+        <p:spPr>
+          <a:xfrm>
+            <a:off x="731520" y="1188720"/>
+            <a:ext cx="10936224" cy="512064"/>
+          </a:xfrm>
+          <a:prstGeom prst="rect">
+            <a:avLst/>
+          </a:prstGeom>
+          <a:noFill/>
+        </p:spPr>
+        <p:txBody>
+          <a:bodyPr wrap="square" lIns="0" rIns="0" tIns="0" bIns="0" anchor="ctr">
+            <a:spAutoFit/>
           </a:bodyPr>
-          <a:lstStyle>
-            <a:defPPr>
-              <a:defRPr lang="en-US"/>
-            </a:defPPr>
-            <a:lvl1pPr marL="342900" indent="-342900" eaLnBrk="0" hangingPunct="0">
-              <a:lnSpc>
-                <a:spcPct val="150000"/>
-              </a:lnSpc>
-              <a:buFont typeface="Wingdings" panose="05000000000000000000" pitchFamily="2" charset="2"/>
-              <a:buChar char="v"/>
-              <a:defRPr sz="1400" b="0">
-                <a:solidFill>
-                  <a:schemeClr val="bg1"/>
-                </a:solidFill>
-                <a:ea typeface="微软雅黑" panose="020B0503020204020204" pitchFamily="34" charset="-122"/>
-                <a:cs typeface="Arial" panose="020B0604020202020204" pitchFamily="34" charset="0"/>
-              </a:defRPr>
-            </a:lvl1pPr>
-          </a:lstStyle>
-          <a:p>
-            <a:r>
-              <a:rPr lang="en-US" altLang="zh-CN" dirty="0"/>
+          <a:lstStyle/>
+          <a:p>
+            <a:r>
+              <a:rPr sz="2200" b="1">
+                <a:solidFill>
+                  <a:srgbClr val="1A1A1A"/>
+                </a:solidFill>
+                <a:latin typeface="Arial"/>
+                <a:ea typeface="PingFang SC"/>
+              </a:rPr>
               <a:t>B 仓由林晓带队，陈蓉带教一周</a:t>
             </a:r>
           </a:p>
@@ -7699,8 +7876,8 @@
           <p:nvPr/>
         </p:nvGraphicFramePr>
         <p:xfrm>
-          <a:off x="621792" y="1188720"/>
-          <a:ext cx="11045949" cy="2655824"/>
+          <a:off x="621792" y="2061972"/>
+          <a:ext cx="11045949" cy="3602736"/>
         </p:xfrm>
         <a:graphic>
           <a:graphicData uri="http://schemas.openxmlformats.org/drawingml/2006/table">
@@ -7713,14 +7890,14 @@
                 <a:gridCol w="3681983"/>
                 <a:gridCol w="3681983"/>
               </a:tblGrid>
-              <a:tr h="331978">
+              <a:tr h="450342">
                 <a:tc>
                   <a:txBody>
                     <a:bodyPr wrap="square"/>
                     <a:lstStyle/>
                     <a:p>
                       <a:r>
-                        <a:rPr sz="1400" b="1">
+                        <a:rPr sz="1800" b="1">
                           <a:solidFill>
                             <a:srgbClr val="1A1A1A"/>
                           </a:solidFill>
@@ -7731,7 +7908,7 @@
                       </a:r>
                     </a:p>
                   </a:txBody>
-                  <a:tcPr marL="91440" marR="91440" marT="54864" marB="54864" anchor="ctr">
+                  <a:tcPr marL="91440" marR="91440" marT="82296" marB="82296" anchor="ctr">
                     <a:lnL w="0" cmpd="sng">
                       <a:noFill/>
                     </a:lnL>
@@ -7757,7 +7934,7 @@
                     <a:lstStyle/>
                     <a:p>
                       <a:r>
-                        <a:rPr sz="1400" b="1">
+                        <a:rPr sz="1800" b="1">
                           <a:solidFill>
                             <a:srgbClr val="1A1A1A"/>
                           </a:solidFill>
@@ -7768,7 +7945,7 @@
                       </a:r>
                     </a:p>
                   </a:txBody>
-                  <a:tcPr marL="91440" marR="91440" marT="54864" marB="54864" anchor="ctr">
+                  <a:tcPr marL="91440" marR="91440" marT="82296" marB="82296" anchor="ctr">
                     <a:lnL w="0" cmpd="sng">
                       <a:noFill/>
                     </a:lnL>
@@ -7794,7 +7971,7 @@
                     <a:lstStyle/>
                     <a:p>
                       <a:r>
-                        <a:rPr sz="1400" b="1">
+                        <a:rPr sz="1800" b="1">
                           <a:solidFill>
                             <a:srgbClr val="1A1A1A"/>
                           </a:solidFill>
@@ -7805,7 +7982,7 @@
                       </a:r>
                     </a:p>
                   </a:txBody>
-                  <a:tcPr marL="91440" marR="91440" marT="54864" marB="54864" anchor="ctr">
+                  <a:tcPr marL="91440" marR="91440" marT="82296" marB="82296" anchor="ctr">
                     <a:lnL w="0" cmpd="sng">
                       <a:noFill/>
                     </a:lnL>
@@ -7826,14 +8003,14 @@
                   </a:tcPr>
                 </a:tc>
               </a:tr>
-              <a:tr h="331978">
+              <a:tr h="450342">
                 <a:tc>
                   <a:txBody>
                     <a:bodyPr wrap="square"/>
                     <a:lstStyle/>
                     <a:p>
                       <a:r>
-                        <a:rPr sz="1400" b="0">
+                        <a:rPr sz="1800" b="0">
                           <a:solidFill>
                             <a:srgbClr val="1A1A1A"/>
                           </a:solidFill>
@@ -7844,7 +8021,7 @@
                       </a:r>
                     </a:p>
                   </a:txBody>
-                  <a:tcPr marL="91440" marR="91440" marT="54864" marB="54864" anchor="ctr">
+                  <a:tcPr marL="91440" marR="91440" marT="82296" marB="82296" anchor="ctr">
                     <a:lnL w="0" cmpd="sng">
                       <a:noFill/>
                     </a:lnL>
@@ -7868,7 +8045,7 @@
                     <a:lstStyle/>
                     <a:p>
                       <a:r>
-                        <a:rPr sz="1400" b="0">
+                        <a:rPr sz="1800" b="0">
                           <a:solidFill>
                             <a:srgbClr val="1A1A1A"/>
                           </a:solidFill>
@@ -7879,7 +8056,7 @@
                       </a:r>
                     </a:p>
                   </a:txBody>
-                  <a:tcPr marL="91440" marR="91440" marT="54864" marB="54864" anchor="ctr">
+                  <a:tcPr marL="91440" marR="91440" marT="82296" marB="82296" anchor="ctr">
                     <a:lnL w="0" cmpd="sng">
                       <a:noFill/>
                     </a:lnL>
@@ -7903,7 +8080,7 @@
                     <a:lstStyle/>
                     <a:p>
                       <a:r>
-                        <a:rPr sz="1400" b="0">
+                        <a:rPr sz="1800" b="0">
                           <a:solidFill>
                             <a:srgbClr val="1A1A1A"/>
                           </a:solidFill>
@@ -7914,7 +8091,7 @@
                       </a:r>
                     </a:p>
                   </a:txBody>
-                  <a:tcPr marL="91440" marR="91440" marT="54864" marB="54864" anchor="ctr">
+                  <a:tcPr marL="91440" marR="91440" marT="82296" marB="82296" anchor="ctr">
                     <a:lnL w="0" cmpd="sng">
                       <a:noFill/>
                     </a:lnL>
@@ -7933,14 +8110,14 @@
                   </a:tcPr>
                 </a:tc>
               </a:tr>
-              <a:tr h="331978">
+              <a:tr h="450342">
                 <a:tc>
                   <a:txBody>
                     <a:bodyPr wrap="square"/>
                     <a:lstStyle/>
                     <a:p>
                       <a:r>
-                        <a:rPr sz="1400" b="0">
+                        <a:rPr sz="1800" b="0">
                           <a:solidFill>
                             <a:srgbClr val="1A1A1A"/>
                           </a:solidFill>
@@ -7951,7 +8128,7 @@
                       </a:r>
                     </a:p>
                   </a:txBody>
-                  <a:tcPr marL="91440" marR="91440" marT="54864" marB="54864" anchor="ctr">
+                  <a:tcPr marL="91440" marR="91440" marT="82296" marB="82296" anchor="ctr">
                     <a:lnL w="0" cmpd="sng">
                       <a:noFill/>
                     </a:lnL>
@@ -7975,7 +8152,7 @@
                     <a:lstStyle/>
                     <a:p>
                       <a:r>
-                        <a:rPr sz="1400" b="0">
+                        <a:rPr sz="1800" b="0">
                           <a:solidFill>
                             <a:srgbClr val="1A1A1A"/>
                           </a:solidFill>
@@ -7986,7 +8163,7 @@
                       </a:r>
                     </a:p>
                   </a:txBody>
-                  <a:tcPr marL="91440" marR="91440" marT="54864" marB="54864" anchor="ctr">
+                  <a:tcPr marL="91440" marR="91440" marT="82296" marB="82296" anchor="ctr">
                     <a:lnL w="0" cmpd="sng">
                       <a:noFill/>
                     </a:lnL>
@@ -8010,7 +8187,7 @@
                     <a:lstStyle/>
                     <a:p>
                       <a:r>
-                        <a:rPr sz="1400" b="0">
+                        <a:rPr sz="1800" b="0">
                           <a:solidFill>
                             <a:srgbClr val="1A1A1A"/>
                           </a:solidFill>
@@ -8021,7 +8198,7 @@
                       </a:r>
                     </a:p>
                   </a:txBody>
-                  <a:tcPr marL="91440" marR="91440" marT="54864" marB="54864" anchor="ctr">
+                  <a:tcPr marL="91440" marR="91440" marT="82296" marB="82296" anchor="ctr">
                     <a:lnL w="0" cmpd="sng">
                       <a:noFill/>
                     </a:lnL>
@@ -8040,14 +8217,14 @@
                   </a:tcPr>
                 </a:tc>
               </a:tr>
-              <a:tr h="331978">
+              <a:tr h="450342">
                 <a:tc>
                   <a:txBody>
                     <a:bodyPr wrap="square"/>
                     <a:lstStyle/>
                     <a:p>
                       <a:r>
-                        <a:rPr sz="1400" b="1">
+                        <a:rPr sz="1800" b="1">
                           <a:solidFill>
                             <a:srgbClr val="1A1A1A"/>
                           </a:solidFill>
@@ -8058,7 +8235,7 @@
                       </a:r>
                     </a:p>
                   </a:txBody>
-                  <a:tcPr marL="91440" marR="91440" marT="54864" marB="54864" anchor="ctr">
+                  <a:tcPr marL="91440" marR="91440" marT="82296" marB="82296" anchor="ctr">
                     <a:lnL w="0" cmpd="sng">
                       <a:noFill/>
                     </a:lnL>
@@ -8082,7 +8259,7 @@
                     <a:lstStyle/>
                     <a:p>
                       <a:r>
-                        <a:rPr sz="1400" b="1">
+                        <a:rPr sz="1800" b="1">
                           <a:solidFill>
                             <a:srgbClr val="1A1A1A"/>
                           </a:solidFill>
@@ -8093,7 +8270,7 @@
                       </a:r>
                     </a:p>
                   </a:txBody>
-                  <a:tcPr marL="91440" marR="91440" marT="54864" marB="54864" anchor="ctr">
+                  <a:tcPr marL="91440" marR="91440" marT="82296" marB="82296" anchor="ctr">
                     <a:lnL w="0" cmpd="sng">
                       <a:noFill/>
                     </a:lnL>
@@ -8117,7 +8294,7 @@
                     <a:lstStyle/>
                     <a:p>
                       <a:r>
-                        <a:rPr sz="1400" b="1">
+                        <a:rPr sz="1800" b="1">
                           <a:solidFill>
                             <a:srgbClr val="1A1A1A"/>
                           </a:solidFill>
@@ -8128,7 +8305,7 @@
                       </a:r>
                     </a:p>
                   </a:txBody>
-                  <a:tcPr marL="91440" marR="91440" marT="54864" marB="54864" anchor="ctr">
+                  <a:tcPr marL="91440" marR="91440" marT="82296" marB="82296" anchor="ctr">
                     <a:lnL w="0" cmpd="sng">
                       <a:noFill/>
                     </a:lnL>
@@ -8147,14 +8324,14 @@
                   </a:tcPr>
                 </a:tc>
               </a:tr>
-              <a:tr h="331978">
+              <a:tr h="450342">
                 <a:tc>
                   <a:txBody>
                     <a:bodyPr wrap="square"/>
                     <a:lstStyle/>
                     <a:p>
                       <a:r>
-                        <a:rPr sz="1400" b="0">
+                        <a:rPr sz="1800" b="0">
                           <a:solidFill>
                             <a:srgbClr val="1A1A1A"/>
                           </a:solidFill>
@@ -8165,7 +8342,7 @@
                       </a:r>
                     </a:p>
                   </a:txBody>
-                  <a:tcPr marL="91440" marR="91440" marT="54864" marB="54864" anchor="ctr">
+                  <a:tcPr marL="91440" marR="91440" marT="82296" marB="82296" anchor="ctr">
                     <a:lnL w="0" cmpd="sng">
                       <a:noFill/>
                     </a:lnL>
@@ -8189,7 +8366,7 @@
                     <a:lstStyle/>
                     <a:p>
                       <a:r>
-                        <a:rPr sz="1400" b="0">
+                        <a:rPr sz="1800" b="0">
                           <a:solidFill>
                             <a:srgbClr val="1A1A1A"/>
                           </a:solidFill>
@@ -8200,7 +8377,7 @@
                       </a:r>
                     </a:p>
                   </a:txBody>
-                  <a:tcPr marL="91440" marR="91440" marT="54864" marB="54864" anchor="ctr">
+                  <a:tcPr marL="91440" marR="91440" marT="82296" marB="82296" anchor="ctr">
                     <a:lnL w="0" cmpd="sng">
                       <a:noFill/>
                     </a:lnL>
@@ -8224,7 +8401,7 @@
                     <a:lstStyle/>
                     <a:p>
                       <a:r>
-                        <a:rPr sz="1400" b="0">
+                        <a:rPr sz="1800" b="0">
                           <a:solidFill>
                             <a:srgbClr val="1A1A1A"/>
                           </a:solidFill>
@@ -8235,7 +8412,7 @@
                       </a:r>
                     </a:p>
                   </a:txBody>
-                  <a:tcPr marL="91440" marR="91440" marT="54864" marB="54864" anchor="ctr">
+                  <a:tcPr marL="91440" marR="91440" marT="82296" marB="82296" anchor="ctr">
                     <a:lnL w="0" cmpd="sng">
                       <a:noFill/>
                     </a:lnL>
@@ -8254,14 +8431,14 @@
                   </a:tcPr>
                 </a:tc>
               </a:tr>
-              <a:tr h="331978">
+              <a:tr h="450342">
                 <a:tc>
                   <a:txBody>
                     <a:bodyPr wrap="square"/>
                     <a:lstStyle/>
                     <a:p>
                       <a:r>
-                        <a:rPr sz="1400" b="0">
+                        <a:rPr sz="1800" b="0">
                           <a:solidFill>
                             <a:srgbClr val="1A1A1A"/>
                           </a:solidFill>
@@ -8272,7 +8449,7 @@
                       </a:r>
                     </a:p>
                   </a:txBody>
-                  <a:tcPr marL="91440" marR="91440" marT="54864" marB="54864" anchor="ctr">
+                  <a:tcPr marL="91440" marR="91440" marT="82296" marB="82296" anchor="ctr">
                     <a:lnL w="0" cmpd="sng">
                       <a:noFill/>
                     </a:lnL>
@@ -8296,7 +8473,7 @@
                     <a:lstStyle/>
                     <a:p>
                       <a:r>
-                        <a:rPr sz="1400" b="0">
+                        <a:rPr sz="1800" b="0">
                           <a:solidFill>
                             <a:srgbClr val="1A1A1A"/>
                           </a:solidFill>
@@ -8307,7 +8484,7 @@
                       </a:r>
                     </a:p>
                   </a:txBody>
-                  <a:tcPr marL="91440" marR="91440" marT="54864" marB="54864" anchor="ctr">
+                  <a:tcPr marL="91440" marR="91440" marT="82296" marB="82296" anchor="ctr">
                     <a:lnL w="0" cmpd="sng">
                       <a:noFill/>
                     </a:lnL>
@@ -8331,7 +8508,7 @@
                     <a:lstStyle/>
                     <a:p>
                       <a:r>
-                        <a:rPr sz="1400" b="0">
+                        <a:rPr sz="1800" b="0">
                           <a:solidFill>
                             <a:srgbClr val="1A1A1A"/>
                           </a:solidFill>
@@ -8342,7 +8519,7 @@
                       </a:r>
                     </a:p>
                   </a:txBody>
-                  <a:tcPr marL="91440" marR="91440" marT="54864" marB="54864" anchor="ctr">
+                  <a:tcPr marL="91440" marR="91440" marT="82296" marB="82296" anchor="ctr">
                     <a:lnL w="0" cmpd="sng">
                       <a:noFill/>
                     </a:lnL>
@@ -8361,14 +8538,14 @@
                   </a:tcPr>
                 </a:tc>
               </a:tr>
-              <a:tr h="331978">
+              <a:tr h="450342">
                 <a:tc>
                   <a:txBody>
                     <a:bodyPr wrap="square"/>
                     <a:lstStyle/>
                     <a:p>
                       <a:r>
-                        <a:rPr sz="1400" b="0">
+                        <a:rPr sz="1800" b="0">
                           <a:solidFill>
                             <a:srgbClr val="1A1A1A"/>
                           </a:solidFill>
@@ -8379,7 +8556,7 @@
                       </a:r>
                     </a:p>
                   </a:txBody>
-                  <a:tcPr marL="91440" marR="91440" marT="54864" marB="54864" anchor="ctr">
+                  <a:tcPr marL="91440" marR="91440" marT="82296" marB="82296" anchor="ctr">
                     <a:lnL w="0" cmpd="sng">
                       <a:noFill/>
                     </a:lnL>
@@ -8403,7 +8580,7 @@
                     <a:lstStyle/>
                     <a:p>
                       <a:r>
-                        <a:rPr sz="1400" b="0">
+                        <a:rPr sz="1800" b="0">
                           <a:solidFill>
                             <a:srgbClr val="1A1A1A"/>
                           </a:solidFill>
@@ -8414,7 +8591,7 @@
                       </a:r>
                     </a:p>
                   </a:txBody>
-                  <a:tcPr marL="91440" marR="91440" marT="54864" marB="54864" anchor="ctr">
+                  <a:tcPr marL="91440" marR="91440" marT="82296" marB="82296" anchor="ctr">
                     <a:lnL w="0" cmpd="sng">
                       <a:noFill/>
                     </a:lnL>
@@ -8438,7 +8615,7 @@
                     <a:lstStyle/>
                     <a:p>
                       <a:r>
-                        <a:rPr sz="1400" b="0">
+                        <a:rPr sz="1800" b="0">
                           <a:solidFill>
                             <a:srgbClr val="1A1A1A"/>
                           </a:solidFill>
@@ -8449,7 +8626,7 @@
                       </a:r>
                     </a:p>
                   </a:txBody>
-                  <a:tcPr marL="91440" marR="91440" marT="54864" marB="54864" anchor="ctr">
+                  <a:tcPr marL="91440" marR="91440" marT="82296" marB="82296" anchor="ctr">
                     <a:lnL w="0" cmpd="sng">
                       <a:noFill/>
                     </a:lnL>
@@ -8468,14 +8645,14 @@
                   </a:tcPr>
                 </a:tc>
               </a:tr>
-              <a:tr h="331978">
+              <a:tr h="450342">
                 <a:tc>
                   <a:txBody>
                     <a:bodyPr wrap="square"/>
                     <a:lstStyle/>
                     <a:p>
                       <a:r>
-                        <a:rPr sz="1400" b="0">
+                        <a:rPr sz="1800" b="0">
                           <a:solidFill>
                             <a:srgbClr val="1A1A1A"/>
                           </a:solidFill>
@@ -8486,7 +8663,7 @@
                       </a:r>
                     </a:p>
                   </a:txBody>
-                  <a:tcPr marL="91440" marR="91440" marT="54864" marB="54864" anchor="ctr">
+                  <a:tcPr marL="91440" marR="91440" marT="82296" marB="82296" anchor="ctr">
                     <a:lnL w="0" cmpd="sng">
                       <a:noFill/>
                     </a:lnL>
@@ -8510,7 +8687,7 @@
                     <a:lstStyle/>
                     <a:p>
                       <a:r>
-                        <a:rPr sz="1400" b="0">
+                        <a:rPr sz="1800" b="0">
                           <a:solidFill>
                             <a:srgbClr val="1A1A1A"/>
                           </a:solidFill>
@@ -8521,7 +8698,7 @@
                       </a:r>
                     </a:p>
                   </a:txBody>
-                  <a:tcPr marL="91440" marR="91440" marT="54864" marB="54864" anchor="ctr">
+                  <a:tcPr marL="91440" marR="91440" marT="82296" marB="82296" anchor="ctr">
                     <a:lnL w="0" cmpd="sng">
                       <a:noFill/>
                     </a:lnL>
@@ -8545,7 +8722,7 @@
                     <a:lstStyle/>
                     <a:p>
                       <a:r>
-                        <a:rPr sz="1400" b="0">
+                        <a:rPr sz="1800" b="0">
                           <a:solidFill>
                             <a:srgbClr val="1A1A1A"/>
                           </a:solidFill>
@@ -8556,7 +8733,7 @@
                       </a:r>
                     </a:p>
                   </a:txBody>
-                  <a:tcPr marL="91440" marR="91440" marT="54864" marB="54864" anchor="ctr">
+                  <a:tcPr marL="91440" marR="91440" marT="82296" marB="82296" anchor="ctr">
                     <a:lnL w="0" cmpd="sng">
                       <a:noFill/>
                     </a:lnL>
@@ -8587,8 +8764,8 @@
         </p:nvSpPr>
         <p:spPr>
           <a:xfrm>
-            <a:off x="512064" y="2184654"/>
-            <a:ext cx="54864" cy="331978"/>
+            <a:off x="512064" y="3412998"/>
+            <a:ext cx="54864" cy="450342"/>
           </a:xfrm>
           <a:prstGeom prst="rect">
             <a:avLst/>
@@ -8611,16 +8788,14 @@
       </p:sp>
       <p:sp>
         <p:nvSpPr>
-          <p:cNvPr id="6" name="Caption Bar"/>
-          <p:cNvSpPr txBox="1">
-            <a:spLocks noChangeArrowheads="1"/>
-          </p:cNvSpPr>
-          <p:nvPr/>
-        </p:nvSpPr>
-        <p:spPr bwMode="auto">
-          <a:xfrm>
-            <a:off x="155575" y="5379048"/>
-            <a:ext cx="11874874" cy="1097952"/>
+          <p:cNvPr id="6" name="Lead Accent"/>
+          <p:cNvSpPr/>
+          <p:nvPr/>
+        </p:nvSpPr>
+        <p:spPr>
+          <a:xfrm>
+            <a:off x="512064" y="1243584"/>
+            <a:ext cx="73152" cy="402336"/>
           </a:xfrm>
           <a:prstGeom prst="rect">
             <a:avLst/>
@@ -8628,51 +8803,105 @@
           <a:solidFill>
             <a:srgbClr val="DB011C"/>
           </a:solidFill>
-          <a:ln w="9525" cap="flat" cmpd="sng" algn="ctr">
-            <a:solidFill>
-              <a:schemeClr val="tx1"/>
-            </a:solidFill>
-            <a:prstDash val="solid"/>
-            <a:round/>
-            <a:headEnd type="none" w="med" len="med"/>
-            <a:tailEnd type="none" w="med" len="med"/>
+          <a:ln>
+            <a:noFill/>
           </a:ln>
           <a:effectLst/>
         </p:spPr>
         <p:txBody>
-          <a:bodyPr vert="horz" wrap="square" lIns="91440" tIns="45720" rIns="91440" bIns="45720" numCol="1" rtlCol="0" anchor="ctr" anchorCtr="0" compatLnSpc="1">
-            <a:prstTxWarp prst="textNoShape">
-              <a:avLst/>
-            </a:prstTxWarp>
+          <a:bodyPr rtlCol="0" anchor="ctr"/>
+          <a:lstStyle/>
+          <a:p>
+            <a:pPr algn="ctr"/>
+          </a:p>
+        </p:txBody>
+      </p:sp>
+      <p:sp>
+        <p:nvSpPr>
+          <p:cNvPr id="7" name="Lead"/>
+          <p:cNvSpPr txBox="1"/>
+          <p:nvPr/>
+        </p:nvSpPr>
+        <p:spPr>
+          <a:xfrm>
+            <a:off x="731520" y="1188720"/>
+            <a:ext cx="10936224" cy="512064"/>
+          </a:xfrm>
+          <a:prstGeom prst="rect">
+            <a:avLst/>
+          </a:prstGeom>
+          <a:noFill/>
+        </p:spPr>
+        <p:txBody>
+          <a:bodyPr wrap="square" lIns="0" rIns="0" tIns="0" bIns="0" anchor="ctr">
+            <a:spAutoFit/>
           </a:bodyPr>
-          <a:lstStyle>
-            <a:defPPr>
-              <a:defRPr lang="en-US"/>
-            </a:defPPr>
-            <a:lvl1pPr marL="342900" indent="-342900" eaLnBrk="0" hangingPunct="0">
-              <a:lnSpc>
-                <a:spcPct val="150000"/>
-              </a:lnSpc>
-              <a:buFont typeface="Wingdings" panose="05000000000000000000" pitchFamily="2" charset="2"/>
-              <a:buChar char="v"/>
-              <a:defRPr sz="1400" b="0">
-                <a:solidFill>
-                  <a:schemeClr val="bg1"/>
-                </a:solidFill>
-                <a:ea typeface="微软雅黑" panose="020B0503020204020204" pitchFamily="34" charset="-122"/>
-                <a:cs typeface="Arial" panose="020B0604020202020204" pitchFamily="34" charset="0"/>
-              </a:defRPr>
-            </a:lvl1pPr>
-          </a:lstStyle>
-          <a:p>
-            <a:r>
-              <a:rPr lang="en-US" altLang="zh-CN" dirty="0"/>
+          <a:lstStyle/>
+          <a:p>
+            <a:r>
+              <a:rPr sz="2200" b="1">
+                <a:solidFill>
+                  <a:srgbClr val="1A1A1A"/>
+                </a:solidFill>
+                <a:latin typeface="Arial"/>
+                <a:ea typeface="PingFang SC"/>
+              </a:rPr>
               <a:t>B 仓条件与 A 仓一致，不需要新增采购</a:t>
             </a:r>
           </a:p>
-          <a:p>
-            <a:r>
-              <a:rPr lang="en-US" altLang="zh-CN" dirty="0"/>
+        </p:txBody>
+      </p:sp>
+      <p:cxnSp>
+        <p:nvCxnSpPr>
+          <p:cNvPr id="8" name="Next Rule"/>
+          <p:cNvCxnSpPr/>
+          <p:nvPr/>
+        </p:nvCxnSpPr>
+        <p:spPr>
+          <a:xfrm>
+            <a:off x="512064" y="5943600"/>
+            <a:ext cx="11155680" cy="0"/>
+          </a:xfrm>
+          <a:prstGeom prst="line">
+            <a:avLst/>
+          </a:prstGeom>
+          <a:ln w="9525">
+            <a:solidFill>
+              <a:srgbClr val="BFBFBF"/>
+            </a:solidFill>
+          </a:ln>
+        </p:spPr>
+      </p:cxnSp>
+      <p:sp>
+        <p:nvSpPr>
+          <p:cNvPr id="9" name="Next Line"/>
+          <p:cNvSpPr txBox="1"/>
+          <p:nvPr/>
+        </p:nvSpPr>
+        <p:spPr>
+          <a:xfrm>
+            <a:off x="512064" y="6016752"/>
+            <a:ext cx="11155680" cy="329184"/>
+          </a:xfrm>
+          <a:prstGeom prst="rect">
+            <a:avLst/>
+          </a:prstGeom>
+          <a:noFill/>
+        </p:spPr>
+        <p:txBody>
+          <a:bodyPr wrap="square" lIns="0" rIns="0" tIns="0" bIns="0" anchor="ctr">
+            <a:spAutoFit/>
+          </a:bodyPr>
+          <a:lstStyle/>
+          <a:p>
+            <a:r>
+              <a:rPr sz="1600" b="1">
+                <a:solidFill>
+                  <a:srgbClr val="1A1A1A"/>
+                </a:solidFill>
+                <a:latin typeface="Arial"/>
+                <a:ea typeface="PingFang SC"/>
+              </a:rPr>
               <a:t>Next: 申请批准 B 仓 11-01 起试运行 1 个月</a:t>
             </a:r>
           </a:p>
